--- a/memo/プロパティとメソッド/プロパティとメソッドの説明.pptx
+++ b/memo/プロパティとメソッド/プロパティとメソッドの説明.pptx
@@ -4,17 +4,23 @@
   <p:sldMasterIdLst>
     <p:sldMasterId id="2147483648" r:id="rId1"/>
   </p:sldMasterIdLst>
+  <p:notesMasterIdLst>
+    <p:notesMasterId r:id="rId15"/>
+  </p:notesMasterIdLst>
   <p:sldIdLst>
     <p:sldId id="256" r:id="rId2"/>
-    <p:sldId id="258" r:id="rId3"/>
-    <p:sldId id="261" r:id="rId4"/>
-    <p:sldId id="262" r:id="rId5"/>
-    <p:sldId id="263" r:id="rId6"/>
-    <p:sldId id="264" r:id="rId7"/>
-    <p:sldId id="267" r:id="rId8"/>
-    <p:sldId id="265" r:id="rId9"/>
-    <p:sldId id="266" r:id="rId10"/>
-    <p:sldId id="268" r:id="rId11"/>
+    <p:sldId id="269" r:id="rId3"/>
+    <p:sldId id="259" r:id="rId4"/>
+    <p:sldId id="257" r:id="rId5"/>
+    <p:sldId id="258" r:id="rId6"/>
+    <p:sldId id="261" r:id="rId7"/>
+    <p:sldId id="262" r:id="rId8"/>
+    <p:sldId id="263" r:id="rId9"/>
+    <p:sldId id="264" r:id="rId10"/>
+    <p:sldId id="267" r:id="rId11"/>
+    <p:sldId id="265" r:id="rId12"/>
+    <p:sldId id="266" r:id="rId13"/>
+    <p:sldId id="268" r:id="rId14"/>
   </p:sldIdLst>
   <p:sldSz cx="12192000" cy="6858000"/>
   <p:notesSz cx="6858000" cy="9144000"/>
@@ -124,7 +130,7 @@
 <file path=ppt/revisionInfo.xml><?xml version="1.0" encoding="utf-8"?>
 <p1510:revInfo xmlns:a="http://schemas.openxmlformats.org/drawingml/2006/main" xmlns:r="http://schemas.openxmlformats.org/officeDocument/2006/relationships" xmlns:p1510="http://schemas.microsoft.com/office/powerpoint/2015/10/main">
   <p1510:revLst>
-    <p1510:client id="{ECDAF82D-EEFA-463F-A03B-7BDA009393E1}" v="3" dt="2026-05-19T15:24:23.681"/>
+    <p1510:client id="{ECDAF82D-EEFA-463F-A03B-7BDA009393E1}" v="7" dt="2026-05-20T00:02:28.198"/>
   </p1510:revLst>
 </p1510:revInfo>
 </file>
@@ -134,10 +140,17 @@
   <pc:docChgLst>
     <pc:chgData name="越智 統" userId="2de33d77-a65a-42d1-92e2-b40da65bb07e" providerId="ADAL" clId="{ECDAF82D-EEFA-463F-A03B-7BDA009393E1}"/>
     <pc:docChg chg="custSel addSld modSld sldOrd">
-      <pc:chgData name="越智 統" userId="2de33d77-a65a-42d1-92e2-b40da65bb07e" providerId="ADAL" clId="{ECDAF82D-EEFA-463F-A03B-7BDA009393E1}" dt="2026-05-19T15:24:36.993" v="347" actId="20577"/>
+      <pc:chgData name="越智 統" userId="2de33d77-a65a-42d1-92e2-b40da65bb07e" providerId="ADAL" clId="{ECDAF82D-EEFA-463F-A03B-7BDA009393E1}" dt="2026-05-20T00:02:33.777" v="372"/>
       <pc:docMkLst>
         <pc:docMk/>
       </pc:docMkLst>
+      <pc:sldChg chg="add">
+        <pc:chgData name="越智 統" userId="2de33d77-a65a-42d1-92e2-b40da65bb07e" providerId="ADAL" clId="{ECDAF82D-EEFA-463F-A03B-7BDA009393E1}" dt="2026-05-19T23:59:57.569" v="348"/>
+        <pc:sldMkLst>
+          <pc:docMk/>
+          <pc:sldMk cId="360896339" sldId="257"/>
+        </pc:sldMkLst>
+      </pc:sldChg>
       <pc:sldChg chg="addSp modSp mod">
         <pc:chgData name="越智 統" userId="2de33d77-a65a-42d1-92e2-b40da65bb07e" providerId="ADAL" clId="{ECDAF82D-EEFA-463F-A03B-7BDA009393E1}" dt="2026-05-19T15:23:27.394" v="291" actId="20577"/>
         <pc:sldMkLst>
@@ -152,6 +165,13 @@
             <ac:spMk id="4" creationId="{6E26B592-2BB2-164D-CEE0-4B3DE6940966}"/>
           </ac:spMkLst>
         </pc:spChg>
+      </pc:sldChg>
+      <pc:sldChg chg="add ord">
+        <pc:chgData name="越智 統" userId="2de33d77-a65a-42d1-92e2-b40da65bb07e" providerId="ADAL" clId="{ECDAF82D-EEFA-463F-A03B-7BDA009393E1}" dt="2026-05-20T00:02:33.777" v="372"/>
+        <pc:sldMkLst>
+          <pc:docMk/>
+          <pc:sldMk cId="473636867" sldId="259"/>
+        </pc:sldMkLst>
       </pc:sldChg>
       <pc:sldChg chg="addSp modSp mod">
         <pc:chgData name="越智 統" userId="2de33d77-a65a-42d1-92e2-b40da65bb07e" providerId="ADAL" clId="{ECDAF82D-EEFA-463F-A03B-7BDA009393E1}" dt="2026-05-19T15:24:13.317" v="331" actId="113"/>
@@ -246,9 +266,689 @@
           </ac:picMkLst>
         </pc:picChg>
       </pc:sldChg>
+      <pc:sldChg chg="addSp modSp new mod">
+        <pc:chgData name="越智 統" userId="2de33d77-a65a-42d1-92e2-b40da65bb07e" providerId="ADAL" clId="{ECDAF82D-EEFA-463F-A03B-7BDA009393E1}" dt="2026-05-20T00:02:28.198" v="370"/>
+        <pc:sldMkLst>
+          <pc:docMk/>
+          <pc:sldMk cId="1791391969" sldId="269"/>
+        </pc:sldMkLst>
+        <pc:spChg chg="add mod">
+          <ac:chgData name="越智 統" userId="2de33d77-a65a-42d1-92e2-b40da65bb07e" providerId="ADAL" clId="{ECDAF82D-EEFA-463F-A03B-7BDA009393E1}" dt="2026-05-20T00:02:17.534" v="369" actId="20577"/>
+          <ac:spMkLst>
+            <pc:docMk/>
+            <pc:sldMk cId="1791391969" sldId="269"/>
+            <ac:spMk id="2" creationId="{F26D70B1-2A4B-E49C-B903-4F89ACB6DE21}"/>
+          </ac:spMkLst>
+        </pc:spChg>
+        <pc:picChg chg="add mod">
+          <ac:chgData name="越智 統" userId="2de33d77-a65a-42d1-92e2-b40da65bb07e" providerId="ADAL" clId="{ECDAF82D-EEFA-463F-A03B-7BDA009393E1}" dt="2026-05-20T00:02:28.198" v="370"/>
+          <ac:picMkLst>
+            <pc:docMk/>
+            <pc:sldMk cId="1791391969" sldId="269"/>
+            <ac:picMk id="3" creationId="{13F1885D-CBEC-87C4-1C69-BDB05F9E144D}"/>
+          </ac:picMkLst>
+        </pc:picChg>
+      </pc:sldChg>
     </pc:docChg>
   </pc:docChgLst>
 </pc:chgInfo>
+</file>
+
+<file path=ppt/notesMasters/notesMaster1.xml><?xml version="1.0" encoding="utf-8"?>
+<p:notesMaster xmlns:a="http://schemas.openxmlformats.org/drawingml/2006/main" xmlns:r="http://schemas.openxmlformats.org/officeDocument/2006/relationships" xmlns:p="http://schemas.openxmlformats.org/presentationml/2006/main">
+  <p:cSld>
+    <p:bg>
+      <p:bgRef idx="1001">
+        <a:schemeClr val="bg1"/>
+      </p:bgRef>
+    </p:bg>
+    <p:spTree>
+      <p:nvGrpSpPr>
+        <p:cNvPr id="1" name=""/>
+        <p:cNvGrpSpPr/>
+        <p:nvPr/>
+      </p:nvGrpSpPr>
+      <p:grpSpPr>
+        <a:xfrm>
+          <a:off x="0" y="0"/>
+          <a:ext cx="0" cy="0"/>
+          <a:chOff x="0" y="0"/>
+          <a:chExt cx="0" cy="0"/>
+        </a:xfrm>
+      </p:grpSpPr>
+      <p:sp>
+        <p:nvSpPr>
+          <p:cNvPr id="2" name="ヘッダー プレースホルダー 1"/>
+          <p:cNvSpPr>
+            <a:spLocks noGrp="1"/>
+          </p:cNvSpPr>
+          <p:nvPr>
+            <p:ph type="hdr" sz="quarter"/>
+          </p:nvPr>
+        </p:nvSpPr>
+        <p:spPr>
+          <a:xfrm>
+            <a:off x="0" y="0"/>
+            <a:ext cx="2971800" cy="458788"/>
+          </a:xfrm>
+          <a:prstGeom prst="rect">
+            <a:avLst/>
+          </a:prstGeom>
+        </p:spPr>
+        <p:txBody>
+          <a:bodyPr vert="horz" lIns="91440" tIns="45720" rIns="91440" bIns="45720" rtlCol="0"/>
+          <a:lstStyle>
+            <a:lvl1pPr algn="l">
+              <a:defRPr sz="1200"/>
+            </a:lvl1pPr>
+          </a:lstStyle>
+          <a:p>
+            <a:endParaRPr kumimoji="1" lang="ja-JP" altLang="en-US"/>
+          </a:p>
+        </p:txBody>
+      </p:sp>
+      <p:sp>
+        <p:nvSpPr>
+          <p:cNvPr id="3" name="日付プレースホルダー 2"/>
+          <p:cNvSpPr>
+            <a:spLocks noGrp="1"/>
+          </p:cNvSpPr>
+          <p:nvPr>
+            <p:ph type="dt" idx="1"/>
+          </p:nvPr>
+        </p:nvSpPr>
+        <p:spPr>
+          <a:xfrm>
+            <a:off x="3884613" y="0"/>
+            <a:ext cx="2971800" cy="458788"/>
+          </a:xfrm>
+          <a:prstGeom prst="rect">
+            <a:avLst/>
+          </a:prstGeom>
+        </p:spPr>
+        <p:txBody>
+          <a:bodyPr vert="horz" lIns="91440" tIns="45720" rIns="91440" bIns="45720" rtlCol="0"/>
+          <a:lstStyle>
+            <a:lvl1pPr algn="r">
+              <a:defRPr sz="1200"/>
+            </a:lvl1pPr>
+          </a:lstStyle>
+          <a:p>
+            <a:fld id="{7EBB2879-17AD-49BC-A031-317F2A27153F}" type="datetimeFigureOut">
+              <a:rPr kumimoji="1" lang="ja-JP" altLang="en-US" smtClean="0"/>
+              <a:t>2026/5/20</a:t>
+            </a:fld>
+            <a:endParaRPr kumimoji="1" lang="ja-JP" altLang="en-US"/>
+          </a:p>
+        </p:txBody>
+      </p:sp>
+      <p:sp>
+        <p:nvSpPr>
+          <p:cNvPr id="4" name="スライド イメージ プレースホルダー 3"/>
+          <p:cNvSpPr>
+            <a:spLocks noGrp="1" noRot="1" noChangeAspect="1"/>
+          </p:cNvSpPr>
+          <p:nvPr>
+            <p:ph type="sldImg" idx="2"/>
+          </p:nvPr>
+        </p:nvSpPr>
+        <p:spPr>
+          <a:xfrm>
+            <a:off x="685800" y="1143000"/>
+            <a:ext cx="5486400" cy="3086100"/>
+          </a:xfrm>
+          <a:prstGeom prst="rect">
+            <a:avLst/>
+          </a:prstGeom>
+          <a:noFill/>
+          <a:ln w="12700">
+            <a:solidFill>
+              <a:prstClr val="black"/>
+            </a:solidFill>
+          </a:ln>
+        </p:spPr>
+        <p:txBody>
+          <a:bodyPr vert="horz" lIns="91440" tIns="45720" rIns="91440" bIns="45720" rtlCol="0" anchor="ctr"/>
+          <a:lstStyle/>
+          <a:p>
+            <a:endParaRPr lang="ja-JP" altLang="en-US"/>
+          </a:p>
+        </p:txBody>
+      </p:sp>
+      <p:sp>
+        <p:nvSpPr>
+          <p:cNvPr id="5" name="ノート プレースホルダー 4"/>
+          <p:cNvSpPr>
+            <a:spLocks noGrp="1"/>
+          </p:cNvSpPr>
+          <p:nvPr>
+            <p:ph type="body" sz="quarter" idx="3"/>
+          </p:nvPr>
+        </p:nvSpPr>
+        <p:spPr>
+          <a:xfrm>
+            <a:off x="685800" y="4400550"/>
+            <a:ext cx="5486400" cy="3600450"/>
+          </a:xfrm>
+          <a:prstGeom prst="rect">
+            <a:avLst/>
+          </a:prstGeom>
+        </p:spPr>
+        <p:txBody>
+          <a:bodyPr vert="horz" lIns="91440" tIns="45720" rIns="91440" bIns="45720" rtlCol="0"/>
+          <a:lstStyle/>
+          <a:p>
+            <a:pPr lvl="0"/>
+            <a:r>
+              <a:rPr kumimoji="1" lang="ja-JP" altLang="en-US"/>
+              <a:t>マスター テキストの書式設定</a:t>
+            </a:r>
+          </a:p>
+          <a:p>
+            <a:pPr lvl="1"/>
+            <a:r>
+              <a:rPr kumimoji="1" lang="ja-JP" altLang="en-US"/>
+              <a:t>第 </a:t>
+            </a:r>
+            <a:r>
+              <a:rPr kumimoji="1" lang="en-US" altLang="ja-JP"/>
+              <a:t>2 </a:t>
+            </a:r>
+            <a:r>
+              <a:rPr kumimoji="1" lang="ja-JP" altLang="en-US"/>
+              <a:t>レベル</a:t>
+            </a:r>
+          </a:p>
+          <a:p>
+            <a:pPr lvl="2"/>
+            <a:r>
+              <a:rPr kumimoji="1" lang="ja-JP" altLang="en-US"/>
+              <a:t>第 </a:t>
+            </a:r>
+            <a:r>
+              <a:rPr kumimoji="1" lang="en-US" altLang="ja-JP"/>
+              <a:t>3 </a:t>
+            </a:r>
+            <a:r>
+              <a:rPr kumimoji="1" lang="ja-JP" altLang="en-US"/>
+              <a:t>レベル</a:t>
+            </a:r>
+          </a:p>
+          <a:p>
+            <a:pPr lvl="3"/>
+            <a:r>
+              <a:rPr kumimoji="1" lang="ja-JP" altLang="en-US"/>
+              <a:t>第 </a:t>
+            </a:r>
+            <a:r>
+              <a:rPr kumimoji="1" lang="en-US" altLang="ja-JP"/>
+              <a:t>4 </a:t>
+            </a:r>
+            <a:r>
+              <a:rPr kumimoji="1" lang="ja-JP" altLang="en-US"/>
+              <a:t>レベル</a:t>
+            </a:r>
+          </a:p>
+          <a:p>
+            <a:pPr lvl="4"/>
+            <a:r>
+              <a:rPr kumimoji="1" lang="ja-JP" altLang="en-US"/>
+              <a:t>第 </a:t>
+            </a:r>
+            <a:r>
+              <a:rPr kumimoji="1" lang="en-US" altLang="ja-JP"/>
+              <a:t>5 </a:t>
+            </a:r>
+            <a:r>
+              <a:rPr kumimoji="1" lang="ja-JP" altLang="en-US"/>
+              <a:t>レベル</a:t>
+            </a:r>
+          </a:p>
+        </p:txBody>
+      </p:sp>
+      <p:sp>
+        <p:nvSpPr>
+          <p:cNvPr id="6" name="フッター プレースホルダー 5"/>
+          <p:cNvSpPr>
+            <a:spLocks noGrp="1"/>
+          </p:cNvSpPr>
+          <p:nvPr>
+            <p:ph type="ftr" sz="quarter" idx="4"/>
+          </p:nvPr>
+        </p:nvSpPr>
+        <p:spPr>
+          <a:xfrm>
+            <a:off x="0" y="8685213"/>
+            <a:ext cx="2971800" cy="458787"/>
+          </a:xfrm>
+          <a:prstGeom prst="rect">
+            <a:avLst/>
+          </a:prstGeom>
+        </p:spPr>
+        <p:txBody>
+          <a:bodyPr vert="horz" lIns="91440" tIns="45720" rIns="91440" bIns="45720" rtlCol="0" anchor="b"/>
+          <a:lstStyle>
+            <a:lvl1pPr algn="l">
+              <a:defRPr sz="1200"/>
+            </a:lvl1pPr>
+          </a:lstStyle>
+          <a:p>
+            <a:endParaRPr kumimoji="1" lang="ja-JP" altLang="en-US"/>
+          </a:p>
+        </p:txBody>
+      </p:sp>
+      <p:sp>
+        <p:nvSpPr>
+          <p:cNvPr id="7" name="スライド番号プレースホルダー 6"/>
+          <p:cNvSpPr>
+            <a:spLocks noGrp="1"/>
+          </p:cNvSpPr>
+          <p:nvPr>
+            <p:ph type="sldNum" sz="quarter" idx="5"/>
+          </p:nvPr>
+        </p:nvSpPr>
+        <p:spPr>
+          <a:xfrm>
+            <a:off x="3884613" y="8685213"/>
+            <a:ext cx="2971800" cy="458787"/>
+          </a:xfrm>
+          <a:prstGeom prst="rect">
+            <a:avLst/>
+          </a:prstGeom>
+        </p:spPr>
+        <p:txBody>
+          <a:bodyPr vert="horz" lIns="91440" tIns="45720" rIns="91440" bIns="45720" rtlCol="0" anchor="b"/>
+          <a:lstStyle>
+            <a:lvl1pPr algn="r">
+              <a:defRPr sz="1200"/>
+            </a:lvl1pPr>
+          </a:lstStyle>
+          <a:p>
+            <a:fld id="{E12DBFF5-32CE-4EB4-9BAF-E16B4EDFE0A1}" type="slidenum">
+              <a:rPr kumimoji="1" lang="ja-JP" altLang="en-US" smtClean="0"/>
+              <a:t>‹#›</a:t>
+            </a:fld>
+            <a:endParaRPr kumimoji="1" lang="ja-JP" altLang="en-US"/>
+          </a:p>
+        </p:txBody>
+      </p:sp>
+    </p:spTree>
+    <p:extLst>
+      <p:ext uri="{BB962C8B-B14F-4D97-AF65-F5344CB8AC3E}">
+        <p14:creationId xmlns:p14="http://schemas.microsoft.com/office/powerpoint/2010/main" val="459040270"/>
+      </p:ext>
+    </p:extLst>
+  </p:cSld>
+  <p:clrMap bg1="lt1" tx1="dk1" bg2="lt2" tx2="dk2" accent1="accent1" accent2="accent2" accent3="accent3" accent4="accent4" accent5="accent5" accent6="accent6" hlink="hlink" folHlink="folHlink"/>
+  <p:notesStyle>
+    <a:lvl1pPr marL="0" algn="l" defTabSz="914400" rtl="0" eaLnBrk="1" latinLnBrk="0" hangingPunct="1">
+      <a:defRPr kumimoji="1" sz="1200" kern="1200">
+        <a:solidFill>
+          <a:schemeClr val="tx1"/>
+        </a:solidFill>
+        <a:latin typeface="+mn-lt"/>
+        <a:ea typeface="+mn-ea"/>
+        <a:cs typeface="+mn-cs"/>
+      </a:defRPr>
+    </a:lvl1pPr>
+    <a:lvl2pPr marL="457200" algn="l" defTabSz="914400" rtl="0" eaLnBrk="1" latinLnBrk="0" hangingPunct="1">
+      <a:defRPr kumimoji="1" sz="1200" kern="1200">
+        <a:solidFill>
+          <a:schemeClr val="tx1"/>
+        </a:solidFill>
+        <a:latin typeface="+mn-lt"/>
+        <a:ea typeface="+mn-ea"/>
+        <a:cs typeface="+mn-cs"/>
+      </a:defRPr>
+    </a:lvl2pPr>
+    <a:lvl3pPr marL="914400" algn="l" defTabSz="914400" rtl="0" eaLnBrk="1" latinLnBrk="0" hangingPunct="1">
+      <a:defRPr kumimoji="1" sz="1200" kern="1200">
+        <a:solidFill>
+          <a:schemeClr val="tx1"/>
+        </a:solidFill>
+        <a:latin typeface="+mn-lt"/>
+        <a:ea typeface="+mn-ea"/>
+        <a:cs typeface="+mn-cs"/>
+      </a:defRPr>
+    </a:lvl3pPr>
+    <a:lvl4pPr marL="1371600" algn="l" defTabSz="914400" rtl="0" eaLnBrk="1" latinLnBrk="0" hangingPunct="1">
+      <a:defRPr kumimoji="1" sz="1200" kern="1200">
+        <a:solidFill>
+          <a:schemeClr val="tx1"/>
+        </a:solidFill>
+        <a:latin typeface="+mn-lt"/>
+        <a:ea typeface="+mn-ea"/>
+        <a:cs typeface="+mn-cs"/>
+      </a:defRPr>
+    </a:lvl4pPr>
+    <a:lvl5pPr marL="1828800" algn="l" defTabSz="914400" rtl="0" eaLnBrk="1" latinLnBrk="0" hangingPunct="1">
+      <a:defRPr kumimoji="1" sz="1200" kern="1200">
+        <a:solidFill>
+          <a:schemeClr val="tx1"/>
+        </a:solidFill>
+        <a:latin typeface="+mn-lt"/>
+        <a:ea typeface="+mn-ea"/>
+        <a:cs typeface="+mn-cs"/>
+      </a:defRPr>
+    </a:lvl5pPr>
+    <a:lvl6pPr marL="2286000" algn="l" defTabSz="914400" rtl="0" eaLnBrk="1" latinLnBrk="0" hangingPunct="1">
+      <a:defRPr kumimoji="1" sz="1200" kern="1200">
+        <a:solidFill>
+          <a:schemeClr val="tx1"/>
+        </a:solidFill>
+        <a:latin typeface="+mn-lt"/>
+        <a:ea typeface="+mn-ea"/>
+        <a:cs typeface="+mn-cs"/>
+      </a:defRPr>
+    </a:lvl6pPr>
+    <a:lvl7pPr marL="2743200" algn="l" defTabSz="914400" rtl="0" eaLnBrk="1" latinLnBrk="0" hangingPunct="1">
+      <a:defRPr kumimoji="1" sz="1200" kern="1200">
+        <a:solidFill>
+          <a:schemeClr val="tx1"/>
+        </a:solidFill>
+        <a:latin typeface="+mn-lt"/>
+        <a:ea typeface="+mn-ea"/>
+        <a:cs typeface="+mn-cs"/>
+      </a:defRPr>
+    </a:lvl7pPr>
+    <a:lvl8pPr marL="3200400" algn="l" defTabSz="914400" rtl="0" eaLnBrk="1" latinLnBrk="0" hangingPunct="1">
+      <a:defRPr kumimoji="1" sz="1200" kern="1200">
+        <a:solidFill>
+          <a:schemeClr val="tx1"/>
+        </a:solidFill>
+        <a:latin typeface="+mn-lt"/>
+        <a:ea typeface="+mn-ea"/>
+        <a:cs typeface="+mn-cs"/>
+      </a:defRPr>
+    </a:lvl8pPr>
+    <a:lvl9pPr marL="3657600" algn="l" defTabSz="914400" rtl="0" eaLnBrk="1" latinLnBrk="0" hangingPunct="1">
+      <a:defRPr kumimoji="1" sz="1200" kern="1200">
+        <a:solidFill>
+          <a:schemeClr val="tx1"/>
+        </a:solidFill>
+        <a:latin typeface="+mn-lt"/>
+        <a:ea typeface="+mn-ea"/>
+        <a:cs typeface="+mn-cs"/>
+      </a:defRPr>
+    </a:lvl9pPr>
+  </p:notesStyle>
+</p:notesMaster>
+</file>
+
+<file path=ppt/notesSlides/notesSlide1.xml><?xml version="1.0" encoding="utf-8"?>
+<p:notes xmlns:a="http://schemas.openxmlformats.org/drawingml/2006/main" xmlns:r="http://schemas.openxmlformats.org/officeDocument/2006/relationships" xmlns:p="http://schemas.openxmlformats.org/presentationml/2006/main">
+  <p:cSld>
+    <p:spTree>
+      <p:nvGrpSpPr>
+        <p:cNvPr id="1" name=""/>
+        <p:cNvGrpSpPr/>
+        <p:nvPr/>
+      </p:nvGrpSpPr>
+      <p:grpSpPr>
+        <a:xfrm>
+          <a:off x="0" y="0"/>
+          <a:ext cx="0" cy="0"/>
+          <a:chOff x="0" y="0"/>
+          <a:chExt cx="0" cy="0"/>
+        </a:xfrm>
+      </p:grpSpPr>
+      <p:sp>
+        <p:nvSpPr>
+          <p:cNvPr id="2" name="スライド イメージ プレースホルダー 1"/>
+          <p:cNvSpPr>
+            <a:spLocks noGrp="1" noRot="1" noChangeAspect="1"/>
+          </p:cNvSpPr>
+          <p:nvPr>
+            <p:ph type="sldImg"/>
+          </p:nvPr>
+        </p:nvSpPr>
+        <p:spPr/>
+      </p:sp>
+      <p:sp>
+        <p:nvSpPr>
+          <p:cNvPr id="3" name="ノート プレースホルダー 2"/>
+          <p:cNvSpPr>
+            <a:spLocks noGrp="1"/>
+          </p:cNvSpPr>
+          <p:nvPr>
+            <p:ph type="body" idx="1"/>
+          </p:nvPr>
+        </p:nvSpPr>
+        <p:spPr/>
+        <p:txBody>
+          <a:bodyPr/>
+          <a:lstStyle/>
+          <a:p>
+            <a:endParaRPr kumimoji="1" lang="ja-JP" altLang="en-US" dirty="0"/>
+          </a:p>
+        </p:txBody>
+      </p:sp>
+      <p:sp>
+        <p:nvSpPr>
+          <p:cNvPr id="4" name="スライド番号プレースホルダー 3"/>
+          <p:cNvSpPr>
+            <a:spLocks noGrp="1"/>
+          </p:cNvSpPr>
+          <p:nvPr>
+            <p:ph type="sldNum" sz="quarter" idx="5"/>
+          </p:nvPr>
+        </p:nvSpPr>
+        <p:spPr/>
+        <p:txBody>
+          <a:bodyPr/>
+          <a:lstStyle/>
+          <a:p>
+            <a:fld id="{E12DBFF5-32CE-4EB4-9BAF-E16B4EDFE0A1}" type="slidenum">
+              <a:rPr kumimoji="1" lang="ja-JP" altLang="en-US" smtClean="0"/>
+              <a:t>2</a:t>
+            </a:fld>
+            <a:endParaRPr kumimoji="1" lang="ja-JP" altLang="en-US"/>
+          </a:p>
+        </p:txBody>
+      </p:sp>
+    </p:spTree>
+    <p:extLst>
+      <p:ext uri="{BB962C8B-B14F-4D97-AF65-F5344CB8AC3E}">
+        <p14:creationId xmlns:p14="http://schemas.microsoft.com/office/powerpoint/2010/main" val="3642863952"/>
+      </p:ext>
+    </p:extLst>
+  </p:cSld>
+  <p:clrMapOvr>
+    <a:masterClrMapping/>
+  </p:clrMapOvr>
+</p:notes>
+</file>
+
+<file path=ppt/notesSlides/notesSlide2.xml><?xml version="1.0" encoding="utf-8"?>
+<p:notes xmlns:a="http://schemas.openxmlformats.org/drawingml/2006/main" xmlns:r="http://schemas.openxmlformats.org/officeDocument/2006/relationships" xmlns:p="http://schemas.openxmlformats.org/presentationml/2006/main">
+  <p:cSld>
+    <p:spTree>
+      <p:nvGrpSpPr>
+        <p:cNvPr id="1" name=""/>
+        <p:cNvGrpSpPr/>
+        <p:nvPr/>
+      </p:nvGrpSpPr>
+      <p:grpSpPr>
+        <a:xfrm>
+          <a:off x="0" y="0"/>
+          <a:ext cx="0" cy="0"/>
+          <a:chOff x="0" y="0"/>
+          <a:chExt cx="0" cy="0"/>
+        </a:xfrm>
+      </p:grpSpPr>
+      <p:sp>
+        <p:nvSpPr>
+          <p:cNvPr id="2" name="スライド イメージ プレースホルダー 1"/>
+          <p:cNvSpPr>
+            <a:spLocks noGrp="1" noRot="1" noChangeAspect="1"/>
+          </p:cNvSpPr>
+          <p:nvPr>
+            <p:ph type="sldImg"/>
+          </p:nvPr>
+        </p:nvSpPr>
+        <p:spPr/>
+      </p:sp>
+      <p:sp>
+        <p:nvSpPr>
+          <p:cNvPr id="3" name="ノート プレースホルダー 2"/>
+          <p:cNvSpPr>
+            <a:spLocks noGrp="1"/>
+          </p:cNvSpPr>
+          <p:nvPr>
+            <p:ph type="body" idx="1"/>
+          </p:nvPr>
+        </p:nvSpPr>
+        <p:spPr/>
+        <p:txBody>
+          <a:bodyPr/>
+          <a:lstStyle/>
+          <a:p>
+            <a:endParaRPr kumimoji="1" lang="ja-JP" altLang="en-US" dirty="0"/>
+          </a:p>
+        </p:txBody>
+      </p:sp>
+      <p:sp>
+        <p:nvSpPr>
+          <p:cNvPr id="4" name="スライド番号プレースホルダー 3"/>
+          <p:cNvSpPr>
+            <a:spLocks noGrp="1"/>
+          </p:cNvSpPr>
+          <p:nvPr>
+            <p:ph type="sldNum" sz="quarter" idx="5"/>
+          </p:nvPr>
+        </p:nvSpPr>
+        <p:spPr/>
+        <p:txBody>
+          <a:bodyPr/>
+          <a:lstStyle/>
+          <a:p>
+            <a:fld id="{E12DBFF5-32CE-4EB4-9BAF-E16B4EDFE0A1}" type="slidenum">
+              <a:rPr kumimoji="1" lang="ja-JP" altLang="en-US" smtClean="0"/>
+              <a:t>3</a:t>
+            </a:fld>
+            <a:endParaRPr kumimoji="1" lang="ja-JP" altLang="en-US"/>
+          </a:p>
+        </p:txBody>
+      </p:sp>
+    </p:spTree>
+    <p:extLst>
+      <p:ext uri="{BB962C8B-B14F-4D97-AF65-F5344CB8AC3E}">
+        <p14:creationId xmlns:p14="http://schemas.microsoft.com/office/powerpoint/2010/main" val="1679541170"/>
+      </p:ext>
+    </p:extLst>
+  </p:cSld>
+  <p:clrMapOvr>
+    <a:masterClrMapping/>
+  </p:clrMapOvr>
+</p:notes>
+</file>
+
+<file path=ppt/notesSlides/notesSlide3.xml><?xml version="1.0" encoding="utf-8"?>
+<p:notes xmlns:a="http://schemas.openxmlformats.org/drawingml/2006/main" xmlns:r="http://schemas.openxmlformats.org/officeDocument/2006/relationships" xmlns:p="http://schemas.openxmlformats.org/presentationml/2006/main">
+  <p:cSld>
+    <p:spTree>
+      <p:nvGrpSpPr>
+        <p:cNvPr id="1" name="">
+          <a:extLst>
+            <a:ext uri="{FF2B5EF4-FFF2-40B4-BE49-F238E27FC236}">
+              <a16:creationId xmlns:a16="http://schemas.microsoft.com/office/drawing/2014/main" id="{D0A4B9C2-E309-00DE-EBCE-7A657D42C35A}"/>
+            </a:ext>
+          </a:extLst>
+        </p:cNvPr>
+        <p:cNvGrpSpPr/>
+        <p:nvPr/>
+      </p:nvGrpSpPr>
+      <p:grpSpPr>
+        <a:xfrm>
+          <a:off x="0" y="0"/>
+          <a:ext cx="0" cy="0"/>
+          <a:chOff x="0" y="0"/>
+          <a:chExt cx="0" cy="0"/>
+        </a:xfrm>
+      </p:grpSpPr>
+      <p:sp>
+        <p:nvSpPr>
+          <p:cNvPr id="2" name="スライド イメージ プレースホルダー 1">
+            <a:extLst>
+              <a:ext uri="{FF2B5EF4-FFF2-40B4-BE49-F238E27FC236}">
+                <a16:creationId xmlns:a16="http://schemas.microsoft.com/office/drawing/2014/main" id="{A04917A9-0CAE-23E0-53D4-73B2E3EDEF90}"/>
+              </a:ext>
+            </a:extLst>
+          </p:cNvPr>
+          <p:cNvSpPr>
+            <a:spLocks noGrp="1" noRot="1" noChangeAspect="1"/>
+          </p:cNvSpPr>
+          <p:nvPr>
+            <p:ph type="sldImg"/>
+          </p:nvPr>
+        </p:nvSpPr>
+        <p:spPr/>
+      </p:sp>
+      <p:sp>
+        <p:nvSpPr>
+          <p:cNvPr id="3" name="ノート プレースホルダー 2">
+            <a:extLst>
+              <a:ext uri="{FF2B5EF4-FFF2-40B4-BE49-F238E27FC236}">
+                <a16:creationId xmlns:a16="http://schemas.microsoft.com/office/drawing/2014/main" id="{AC042036-E522-C095-A625-E651B0E41ACE}"/>
+              </a:ext>
+            </a:extLst>
+          </p:cNvPr>
+          <p:cNvSpPr>
+            <a:spLocks noGrp="1"/>
+          </p:cNvSpPr>
+          <p:nvPr>
+            <p:ph type="body" idx="1"/>
+          </p:nvPr>
+        </p:nvSpPr>
+        <p:spPr/>
+        <p:txBody>
+          <a:bodyPr/>
+          <a:lstStyle/>
+          <a:p>
+            <a:endParaRPr kumimoji="1" lang="ja-JP" altLang="en-US" dirty="0"/>
+          </a:p>
+        </p:txBody>
+      </p:sp>
+      <p:sp>
+        <p:nvSpPr>
+          <p:cNvPr id="4" name="スライド番号プレースホルダー 3">
+            <a:extLst>
+              <a:ext uri="{FF2B5EF4-FFF2-40B4-BE49-F238E27FC236}">
+                <a16:creationId xmlns:a16="http://schemas.microsoft.com/office/drawing/2014/main" id="{5312B0EB-F038-B373-60B8-65CA6C36F7E4}"/>
+              </a:ext>
+            </a:extLst>
+          </p:cNvPr>
+          <p:cNvSpPr>
+            <a:spLocks noGrp="1"/>
+          </p:cNvSpPr>
+          <p:nvPr>
+            <p:ph type="sldNum" sz="quarter" idx="5"/>
+          </p:nvPr>
+        </p:nvSpPr>
+        <p:spPr/>
+        <p:txBody>
+          <a:bodyPr/>
+          <a:lstStyle/>
+          <a:p>
+            <a:fld id="{E3250B6B-1A29-4028-9D9F-02BB49CE4107}" type="slidenum">
+              <a:rPr kumimoji="1" lang="ja-JP" altLang="en-US" smtClean="0"/>
+              <a:t>4</a:t>
+            </a:fld>
+            <a:endParaRPr kumimoji="1" lang="ja-JP" altLang="en-US"/>
+          </a:p>
+        </p:txBody>
+      </p:sp>
+    </p:spTree>
+    <p:extLst>
+      <p:ext uri="{BB962C8B-B14F-4D97-AF65-F5344CB8AC3E}">
+        <p14:creationId xmlns:p14="http://schemas.microsoft.com/office/powerpoint/2010/main" val="2902379987"/>
+      </p:ext>
+    </p:extLst>
+  </p:cSld>
+  <p:clrMapOvr>
+    <a:masterClrMapping/>
+  </p:clrMapOvr>
+</p:notes>
 </file>
 
 <file path=ppt/slideLayouts/slideLayout1.xml><?xml version="1.0" encoding="utf-8"?>
@@ -398,7 +1098,7 @@
           <a:p>
             <a:fld id="{79A0680B-6FA7-4943-A208-41F528ABFF47}" type="datetimeFigureOut">
               <a:rPr kumimoji="1" lang="ja-JP" altLang="en-US" smtClean="0"/>
-              <a:t>2026/5/19</a:t>
+              <a:t>2026/5/20</a:t>
             </a:fld>
             <a:endParaRPr kumimoji="1" lang="ja-JP" altLang="en-US"/>
           </a:p>
@@ -628,7 +1328,7 @@
           <a:p>
             <a:fld id="{79A0680B-6FA7-4943-A208-41F528ABFF47}" type="datetimeFigureOut">
               <a:rPr kumimoji="1" lang="ja-JP" altLang="en-US" smtClean="0"/>
-              <a:t>2026/5/19</a:t>
+              <a:t>2026/5/20</a:t>
             </a:fld>
             <a:endParaRPr kumimoji="1" lang="ja-JP" altLang="en-US"/>
           </a:p>
@@ -868,7 +1568,7 @@
           <a:p>
             <a:fld id="{79A0680B-6FA7-4943-A208-41F528ABFF47}" type="datetimeFigureOut">
               <a:rPr kumimoji="1" lang="ja-JP" altLang="en-US" smtClean="0"/>
-              <a:t>2026/5/19</a:t>
+              <a:t>2026/5/20</a:t>
             </a:fld>
             <a:endParaRPr kumimoji="1" lang="ja-JP" altLang="en-US"/>
           </a:p>
@@ -1098,7 +1798,7 @@
           <a:p>
             <a:fld id="{79A0680B-6FA7-4943-A208-41F528ABFF47}" type="datetimeFigureOut">
               <a:rPr kumimoji="1" lang="ja-JP" altLang="en-US" smtClean="0"/>
-              <a:t>2026/5/19</a:t>
+              <a:t>2026/5/20</a:t>
             </a:fld>
             <a:endParaRPr kumimoji="1" lang="ja-JP" altLang="en-US"/>
           </a:p>
@@ -1373,7 +2073,7 @@
           <a:p>
             <a:fld id="{79A0680B-6FA7-4943-A208-41F528ABFF47}" type="datetimeFigureOut">
               <a:rPr kumimoji="1" lang="ja-JP" altLang="en-US" smtClean="0"/>
-              <a:t>2026/5/19</a:t>
+              <a:t>2026/5/20</a:t>
             </a:fld>
             <a:endParaRPr kumimoji="1" lang="ja-JP" altLang="en-US"/>
           </a:p>
@@ -1702,7 +2402,7 @@
           <a:p>
             <a:fld id="{79A0680B-6FA7-4943-A208-41F528ABFF47}" type="datetimeFigureOut">
               <a:rPr kumimoji="1" lang="ja-JP" altLang="en-US" smtClean="0"/>
-              <a:t>2026/5/19</a:t>
+              <a:t>2026/5/20</a:t>
             </a:fld>
             <a:endParaRPr kumimoji="1" lang="ja-JP" altLang="en-US"/>
           </a:p>
@@ -2178,7 +2878,7 @@
           <a:p>
             <a:fld id="{79A0680B-6FA7-4943-A208-41F528ABFF47}" type="datetimeFigureOut">
               <a:rPr kumimoji="1" lang="ja-JP" altLang="en-US" smtClean="0"/>
-              <a:t>2026/5/19</a:t>
+              <a:t>2026/5/20</a:t>
             </a:fld>
             <a:endParaRPr kumimoji="1" lang="ja-JP" altLang="en-US"/>
           </a:p>
@@ -2319,7 +3019,7 @@
           <a:p>
             <a:fld id="{79A0680B-6FA7-4943-A208-41F528ABFF47}" type="datetimeFigureOut">
               <a:rPr kumimoji="1" lang="ja-JP" altLang="en-US" smtClean="0"/>
-              <a:t>2026/5/19</a:t>
+              <a:t>2026/5/20</a:t>
             </a:fld>
             <a:endParaRPr kumimoji="1" lang="ja-JP" altLang="en-US"/>
           </a:p>
@@ -2432,7 +3132,7 @@
           <a:p>
             <a:fld id="{79A0680B-6FA7-4943-A208-41F528ABFF47}" type="datetimeFigureOut">
               <a:rPr kumimoji="1" lang="ja-JP" altLang="en-US" smtClean="0"/>
-              <a:t>2026/5/19</a:t>
+              <a:t>2026/5/20</a:t>
             </a:fld>
             <a:endParaRPr kumimoji="1" lang="ja-JP" altLang="en-US"/>
           </a:p>
@@ -2775,7 +3475,7 @@
           <a:p>
             <a:fld id="{79A0680B-6FA7-4943-A208-41F528ABFF47}" type="datetimeFigureOut">
               <a:rPr kumimoji="1" lang="ja-JP" altLang="en-US" smtClean="0"/>
-              <a:t>2026/5/19</a:t>
+              <a:t>2026/5/20</a:t>
             </a:fld>
             <a:endParaRPr kumimoji="1" lang="ja-JP" altLang="en-US"/>
           </a:p>
@@ -3063,7 +3763,7 @@
           <a:p>
             <a:fld id="{79A0680B-6FA7-4943-A208-41F528ABFF47}" type="datetimeFigureOut">
               <a:rPr kumimoji="1" lang="ja-JP" altLang="en-US" smtClean="0"/>
-              <a:t>2026/5/19</a:t>
+              <a:t>2026/5/20</a:t>
             </a:fld>
             <a:endParaRPr kumimoji="1" lang="ja-JP" altLang="en-US"/>
           </a:p>
@@ -3336,7 +4036,7 @@
           <a:p>
             <a:fld id="{79A0680B-6FA7-4943-A208-41F528ABFF47}" type="datetimeFigureOut">
               <a:rPr kumimoji="1" lang="ja-JP" altLang="en-US" smtClean="0"/>
-              <a:t>2026/5/19</a:t>
+              <a:t>2026/5/20</a:t>
             </a:fld>
             <a:endParaRPr kumimoji="1" lang="ja-JP" altLang="en-US"/>
           </a:p>
@@ -3827,6 +4527,1360 @@
   <p:cSld>
     <p:spTree>
       <p:nvGrpSpPr>
+        <p:cNvPr id="1" name=""/>
+        <p:cNvGrpSpPr/>
+        <p:nvPr/>
+      </p:nvGrpSpPr>
+      <p:grpSpPr>
+        <a:xfrm>
+          <a:off x="0" y="0"/>
+          <a:ext cx="0" cy="0"/>
+          <a:chOff x="0" y="0"/>
+          <a:chExt cx="0" cy="0"/>
+        </a:xfrm>
+      </p:grpSpPr>
+      <p:sp>
+        <p:nvSpPr>
+          <p:cNvPr id="3" name="テキスト ボックス 2">
+            <a:extLst>
+              <a:ext uri="{FF2B5EF4-FFF2-40B4-BE49-F238E27FC236}">
+                <a16:creationId xmlns:a16="http://schemas.microsoft.com/office/drawing/2014/main" id="{0E458772-A55E-C3DF-F650-004E6885C1AF}"/>
+              </a:ext>
+            </a:extLst>
+          </p:cNvPr>
+          <p:cNvSpPr txBox="1"/>
+          <p:nvPr/>
+        </p:nvSpPr>
+        <p:spPr>
+          <a:xfrm>
+            <a:off x="1671771" y="1111762"/>
+            <a:ext cx="9152164" cy="786497"/>
+          </a:xfrm>
+          <a:prstGeom prst="rect">
+            <a:avLst/>
+          </a:prstGeom>
+          <a:solidFill>
+            <a:schemeClr val="bg2"/>
+          </a:solidFill>
+        </p:spPr>
+        <p:txBody>
+          <a:bodyPr wrap="square">
+            <a:spAutoFit/>
+          </a:bodyPr>
+          <a:lstStyle/>
+          <a:p>
+            <a:pPr>
+              <a:lnSpc>
+                <a:spcPts val="1800"/>
+              </a:lnSpc>
+            </a:pPr>
+            <a:r>
+              <a:rPr lang="en-US" altLang="ja-JP" b="0" dirty="0">
+                <a:solidFill>
+                  <a:srgbClr val="93A1A1"/>
+                </a:solidFill>
+                <a:effectLst/>
+                <a:latin typeface="Consolas" panose="020B0609020204030204" pitchFamily="49" charset="0"/>
+              </a:rPr>
+              <a:t>&lt;</a:t>
+            </a:r>
+            <a:r>
+              <a:rPr lang="en-US" altLang="ja-JP" b="0" dirty="0">
+                <a:solidFill>
+                  <a:srgbClr val="268BD2"/>
+                </a:solidFill>
+                <a:effectLst/>
+                <a:latin typeface="Consolas" panose="020B0609020204030204" pitchFamily="49" charset="0"/>
+              </a:rPr>
+              <a:t>button</a:t>
+            </a:r>
+            <a:r>
+              <a:rPr lang="en-US" altLang="ja-JP" b="0" dirty="0">
+                <a:solidFill>
+                  <a:srgbClr val="657B83"/>
+                </a:solidFill>
+                <a:effectLst/>
+                <a:latin typeface="Consolas" panose="020B0609020204030204" pitchFamily="49" charset="0"/>
+              </a:rPr>
+              <a:t> </a:t>
+            </a:r>
+            <a:r>
+              <a:rPr lang="en-US" altLang="ja-JP" b="0" dirty="0">
+                <a:solidFill>
+                  <a:srgbClr val="93A1A1"/>
+                </a:solidFill>
+                <a:effectLst/>
+                <a:latin typeface="Consolas" panose="020B0609020204030204" pitchFamily="49" charset="0"/>
+              </a:rPr>
+              <a:t>type</a:t>
+            </a:r>
+            <a:r>
+              <a:rPr lang="en-US" altLang="ja-JP" b="0" dirty="0">
+                <a:solidFill>
+                  <a:srgbClr val="657B83"/>
+                </a:solidFill>
+                <a:effectLst/>
+                <a:latin typeface="Consolas" panose="020B0609020204030204" pitchFamily="49" charset="0"/>
+              </a:rPr>
+              <a:t>=</a:t>
+            </a:r>
+            <a:r>
+              <a:rPr lang="en-US" altLang="ja-JP" b="0" dirty="0">
+                <a:solidFill>
+                  <a:srgbClr val="2AA198"/>
+                </a:solidFill>
+                <a:effectLst/>
+                <a:latin typeface="Consolas" panose="020B0609020204030204" pitchFamily="49" charset="0"/>
+              </a:rPr>
+              <a:t>"button"</a:t>
+            </a:r>
+            <a:r>
+              <a:rPr lang="en-US" altLang="ja-JP" b="0" dirty="0">
+                <a:solidFill>
+                  <a:srgbClr val="657B83"/>
+                </a:solidFill>
+                <a:effectLst/>
+                <a:latin typeface="Consolas" panose="020B0609020204030204" pitchFamily="49" charset="0"/>
+              </a:rPr>
+              <a:t> </a:t>
+            </a:r>
+            <a:r>
+              <a:rPr lang="en-US" altLang="ja-JP" b="0" dirty="0">
+                <a:solidFill>
+                  <a:srgbClr val="93A1A1"/>
+                </a:solidFill>
+                <a:effectLst/>
+                <a:latin typeface="Consolas" panose="020B0609020204030204" pitchFamily="49" charset="0"/>
+              </a:rPr>
+              <a:t>onclick</a:t>
+            </a:r>
+            <a:r>
+              <a:rPr lang="en-US" altLang="ja-JP" b="0" dirty="0">
+                <a:solidFill>
+                  <a:srgbClr val="657B83"/>
+                </a:solidFill>
+                <a:effectLst/>
+                <a:latin typeface="Consolas" panose="020B0609020204030204" pitchFamily="49" charset="0"/>
+              </a:rPr>
+              <a:t>=</a:t>
+            </a:r>
+            <a:r>
+              <a:rPr lang="en-US" altLang="ja-JP" b="0" dirty="0">
+                <a:solidFill>
+                  <a:srgbClr val="2AA198"/>
+                </a:solidFill>
+                <a:effectLst/>
+                <a:latin typeface="Consolas" panose="020B0609020204030204" pitchFamily="49" charset="0"/>
+              </a:rPr>
+              <a:t>"</a:t>
+            </a:r>
+            <a:r>
+              <a:rPr lang="en-US" altLang="ja-JP" b="0" dirty="0" err="1">
+                <a:solidFill>
+                  <a:srgbClr val="268BD2"/>
+                </a:solidFill>
+                <a:effectLst/>
+                <a:latin typeface="Consolas" panose="020B0609020204030204" pitchFamily="49" charset="0"/>
+              </a:rPr>
+              <a:t>document</a:t>
+            </a:r>
+            <a:r>
+              <a:rPr lang="en-US" altLang="ja-JP" b="0" dirty="0" err="1">
+                <a:solidFill>
+                  <a:srgbClr val="2AA198"/>
+                </a:solidFill>
+                <a:effectLst/>
+                <a:latin typeface="Consolas" panose="020B0609020204030204" pitchFamily="49" charset="0"/>
+              </a:rPr>
+              <a:t>.</a:t>
+            </a:r>
+            <a:r>
+              <a:rPr lang="en-US" altLang="ja-JP" b="0" dirty="0" err="1">
+                <a:solidFill>
+                  <a:srgbClr val="268BD2"/>
+                </a:solidFill>
+                <a:effectLst/>
+                <a:latin typeface="Consolas" panose="020B0609020204030204" pitchFamily="49" charset="0"/>
+              </a:rPr>
+              <a:t>body</a:t>
+            </a:r>
+            <a:r>
+              <a:rPr lang="en-US" altLang="ja-JP" b="0" dirty="0" err="1">
+                <a:solidFill>
+                  <a:srgbClr val="2AA198"/>
+                </a:solidFill>
+                <a:effectLst/>
+                <a:latin typeface="Consolas" panose="020B0609020204030204" pitchFamily="49" charset="0"/>
+              </a:rPr>
+              <a:t>.</a:t>
+            </a:r>
+            <a:r>
+              <a:rPr lang="en-US" altLang="ja-JP" b="0" dirty="0" err="1">
+                <a:solidFill>
+                  <a:srgbClr val="268BD2"/>
+                </a:solidFill>
+                <a:effectLst/>
+                <a:latin typeface="Consolas" panose="020B0609020204030204" pitchFamily="49" charset="0"/>
+              </a:rPr>
+              <a:t>style</a:t>
+            </a:r>
+            <a:r>
+              <a:rPr lang="en-US" altLang="ja-JP" b="0" dirty="0" err="1">
+                <a:solidFill>
+                  <a:srgbClr val="2AA198"/>
+                </a:solidFill>
+                <a:effectLst/>
+                <a:latin typeface="Consolas" panose="020B0609020204030204" pitchFamily="49" charset="0"/>
+              </a:rPr>
+              <a:t>.</a:t>
+            </a:r>
+            <a:r>
+              <a:rPr lang="en-US" altLang="ja-JP" b="0" dirty="0" err="1">
+                <a:solidFill>
+                  <a:srgbClr val="268BD2"/>
+                </a:solidFill>
+                <a:effectLst/>
+                <a:latin typeface="Consolas" panose="020B0609020204030204" pitchFamily="49" charset="0"/>
+              </a:rPr>
+              <a:t>color</a:t>
+            </a:r>
+            <a:r>
+              <a:rPr lang="en-US" altLang="ja-JP" b="0" dirty="0">
+                <a:solidFill>
+                  <a:srgbClr val="859900"/>
+                </a:solidFill>
+                <a:effectLst/>
+                <a:latin typeface="Consolas" panose="020B0609020204030204" pitchFamily="49" charset="0"/>
+              </a:rPr>
+              <a:t>=</a:t>
+            </a:r>
+            <a:r>
+              <a:rPr lang="en-US" altLang="ja-JP" b="0" dirty="0">
+                <a:solidFill>
+                  <a:srgbClr val="2AA198"/>
+                </a:solidFill>
+                <a:effectLst/>
+                <a:latin typeface="Consolas" panose="020B0609020204030204" pitchFamily="49" charset="0"/>
+              </a:rPr>
+              <a:t>'red’"</a:t>
+            </a:r>
+            <a:r>
+              <a:rPr lang="en-US" altLang="ja-JP" b="0" dirty="0">
+                <a:solidFill>
+                  <a:srgbClr val="93A1A1"/>
+                </a:solidFill>
+                <a:effectLst/>
+                <a:latin typeface="Consolas" panose="020B0609020204030204" pitchFamily="49" charset="0"/>
+              </a:rPr>
+              <a:t>&gt;</a:t>
+            </a:r>
+          </a:p>
+          <a:p>
+            <a:pPr>
+              <a:lnSpc>
+                <a:spcPts val="1800"/>
+              </a:lnSpc>
+            </a:pPr>
+            <a:r>
+              <a:rPr lang="ja-JP" altLang="en-US" b="0" dirty="0">
+                <a:solidFill>
+                  <a:srgbClr val="657B83"/>
+                </a:solidFill>
+                <a:effectLst/>
+                <a:latin typeface="Consolas" panose="020B0609020204030204" pitchFamily="49" charset="0"/>
+              </a:rPr>
+              <a:t>    文字を赤くします</a:t>
+            </a:r>
+            <a:endParaRPr lang="en-US" altLang="ja-JP" b="0" dirty="0">
+              <a:solidFill>
+                <a:srgbClr val="657B83"/>
+              </a:solidFill>
+              <a:effectLst/>
+              <a:latin typeface="Consolas" panose="020B0609020204030204" pitchFamily="49" charset="0"/>
+            </a:endParaRPr>
+          </a:p>
+          <a:p>
+            <a:pPr>
+              <a:lnSpc>
+                <a:spcPts val="1800"/>
+              </a:lnSpc>
+            </a:pPr>
+            <a:r>
+              <a:rPr lang="en-US" altLang="ja-JP" b="0" dirty="0">
+                <a:solidFill>
+                  <a:srgbClr val="93A1A1"/>
+                </a:solidFill>
+                <a:effectLst/>
+                <a:latin typeface="Consolas" panose="020B0609020204030204" pitchFamily="49" charset="0"/>
+              </a:rPr>
+              <a:t>&lt;/</a:t>
+            </a:r>
+            <a:r>
+              <a:rPr lang="en-US" altLang="ja-JP" b="0" dirty="0">
+                <a:solidFill>
+                  <a:srgbClr val="268BD2"/>
+                </a:solidFill>
+                <a:effectLst/>
+                <a:latin typeface="Consolas" panose="020B0609020204030204" pitchFamily="49" charset="0"/>
+              </a:rPr>
+              <a:t>button</a:t>
+            </a:r>
+            <a:r>
+              <a:rPr lang="en-US" altLang="ja-JP" b="0" dirty="0">
+                <a:solidFill>
+                  <a:srgbClr val="93A1A1"/>
+                </a:solidFill>
+                <a:effectLst/>
+                <a:latin typeface="Consolas" panose="020B0609020204030204" pitchFamily="49" charset="0"/>
+              </a:rPr>
+              <a:t>&gt;</a:t>
+            </a:r>
+            <a:endParaRPr lang="en-US" altLang="ja-JP" b="0" dirty="0">
+              <a:solidFill>
+                <a:srgbClr val="657B83"/>
+              </a:solidFill>
+              <a:effectLst/>
+              <a:latin typeface="Consolas" panose="020B0609020204030204" pitchFamily="49" charset="0"/>
+            </a:endParaRPr>
+          </a:p>
+        </p:txBody>
+      </p:sp>
+      <p:sp>
+        <p:nvSpPr>
+          <p:cNvPr id="4" name="テキスト ボックス 3">
+            <a:extLst>
+              <a:ext uri="{FF2B5EF4-FFF2-40B4-BE49-F238E27FC236}">
+                <a16:creationId xmlns:a16="http://schemas.microsoft.com/office/drawing/2014/main" id="{EEE52158-02B9-098D-1232-536FCF673AC7}"/>
+              </a:ext>
+            </a:extLst>
+          </p:cNvPr>
+          <p:cNvSpPr txBox="1"/>
+          <p:nvPr/>
+        </p:nvSpPr>
+        <p:spPr>
+          <a:xfrm>
+            <a:off x="3054943" y="2254568"/>
+            <a:ext cx="6082114" cy="1200329"/>
+          </a:xfrm>
+          <a:prstGeom prst="rect">
+            <a:avLst/>
+          </a:prstGeom>
+          <a:noFill/>
+        </p:spPr>
+        <p:txBody>
+          <a:bodyPr wrap="none" rtlCol="0">
+            <a:spAutoFit/>
+          </a:bodyPr>
+          <a:lstStyle/>
+          <a:p>
+            <a:r>
+              <a:rPr lang="ja-JP" altLang="en-US" b="0" dirty="0">
+                <a:effectLst/>
+                <a:latin typeface="Consolas" panose="020B0609020204030204" pitchFamily="49" charset="0"/>
+              </a:rPr>
+              <a:t>ボタンをクリックすると</a:t>
+            </a:r>
+            <a:endParaRPr lang="en-US" altLang="ja-JP" b="0" dirty="0">
+              <a:effectLst/>
+              <a:latin typeface="Consolas" panose="020B0609020204030204" pitchFamily="49" charset="0"/>
+            </a:endParaRPr>
+          </a:p>
+          <a:p>
+            <a:r>
+              <a:rPr lang="ja-JP" altLang="en-US" b="0" dirty="0">
+                <a:solidFill>
+                  <a:srgbClr val="268BD2"/>
+                </a:solidFill>
+                <a:effectLst/>
+                <a:latin typeface="Consolas" panose="020B0609020204030204" pitchFamily="49" charset="0"/>
+              </a:rPr>
+              <a:t>「</a:t>
+            </a:r>
+            <a:r>
+              <a:rPr lang="en-US" altLang="ja-JP" b="0" dirty="0" err="1">
+                <a:solidFill>
+                  <a:srgbClr val="268BD2"/>
+                </a:solidFill>
+                <a:effectLst/>
+                <a:latin typeface="Consolas" panose="020B0609020204030204" pitchFamily="49" charset="0"/>
+              </a:rPr>
+              <a:t>document</a:t>
+            </a:r>
+            <a:r>
+              <a:rPr lang="en-US" altLang="ja-JP" b="0" dirty="0" err="1">
+                <a:solidFill>
+                  <a:srgbClr val="2AA198"/>
+                </a:solidFill>
+                <a:effectLst/>
+                <a:latin typeface="Consolas" panose="020B0609020204030204" pitchFamily="49" charset="0"/>
+              </a:rPr>
+              <a:t>.</a:t>
+            </a:r>
+            <a:r>
+              <a:rPr lang="en-US" altLang="ja-JP" b="0" dirty="0" err="1">
+                <a:solidFill>
+                  <a:srgbClr val="268BD2"/>
+                </a:solidFill>
+                <a:effectLst/>
+                <a:latin typeface="Consolas" panose="020B0609020204030204" pitchFamily="49" charset="0"/>
+              </a:rPr>
+              <a:t>body</a:t>
+            </a:r>
+            <a:r>
+              <a:rPr lang="en-US" altLang="ja-JP" b="0" dirty="0" err="1">
+                <a:solidFill>
+                  <a:srgbClr val="2AA198"/>
+                </a:solidFill>
+                <a:effectLst/>
+                <a:latin typeface="Consolas" panose="020B0609020204030204" pitchFamily="49" charset="0"/>
+              </a:rPr>
+              <a:t>.</a:t>
+            </a:r>
+            <a:r>
+              <a:rPr lang="en-US" altLang="ja-JP" b="0" dirty="0" err="1">
+                <a:solidFill>
+                  <a:srgbClr val="268BD2"/>
+                </a:solidFill>
+                <a:effectLst/>
+                <a:latin typeface="Consolas" panose="020B0609020204030204" pitchFamily="49" charset="0"/>
+              </a:rPr>
+              <a:t>style</a:t>
+            </a:r>
+            <a:r>
+              <a:rPr lang="en-US" altLang="ja-JP" b="0" dirty="0" err="1">
+                <a:solidFill>
+                  <a:srgbClr val="2AA198"/>
+                </a:solidFill>
+                <a:effectLst/>
+                <a:latin typeface="Consolas" panose="020B0609020204030204" pitchFamily="49" charset="0"/>
+              </a:rPr>
+              <a:t>.</a:t>
+            </a:r>
+            <a:r>
+              <a:rPr lang="en-US" altLang="ja-JP" b="0" dirty="0" err="1">
+                <a:solidFill>
+                  <a:srgbClr val="268BD2"/>
+                </a:solidFill>
+                <a:effectLst/>
+                <a:latin typeface="Consolas" panose="020B0609020204030204" pitchFamily="49" charset="0"/>
+              </a:rPr>
+              <a:t>color</a:t>
+            </a:r>
+            <a:r>
+              <a:rPr lang="ja-JP" altLang="en-US" b="0" dirty="0">
+                <a:solidFill>
+                  <a:srgbClr val="268BD2"/>
+                </a:solidFill>
+                <a:effectLst/>
+                <a:latin typeface="Consolas" panose="020B0609020204030204" pitchFamily="49" charset="0"/>
+              </a:rPr>
+              <a:t>」</a:t>
+            </a:r>
+            <a:endParaRPr lang="en-US" altLang="ja-JP" b="0" dirty="0">
+              <a:solidFill>
+                <a:srgbClr val="268BD2"/>
+              </a:solidFill>
+              <a:effectLst/>
+              <a:latin typeface="Consolas" panose="020B0609020204030204" pitchFamily="49" charset="0"/>
+            </a:endParaRPr>
+          </a:p>
+          <a:p>
+            <a:r>
+              <a:rPr kumimoji="1" lang="ja-JP" altLang="en-US" dirty="0">
+                <a:latin typeface="Consolas" panose="020B0609020204030204" pitchFamily="49" charset="0"/>
+              </a:rPr>
+              <a:t>というプロパティを</a:t>
+            </a:r>
+            <a:r>
+              <a:rPr kumimoji="1" lang="en-US" altLang="ja-JP" dirty="0">
+                <a:latin typeface="Consolas" panose="020B0609020204030204" pitchFamily="49" charset="0"/>
+              </a:rPr>
+              <a:t>’red’</a:t>
+            </a:r>
+            <a:r>
+              <a:rPr kumimoji="1" lang="ja-JP" altLang="en-US" dirty="0">
+                <a:latin typeface="Consolas" panose="020B0609020204030204" pitchFamily="49" charset="0"/>
+              </a:rPr>
+              <a:t>に変更</a:t>
+            </a:r>
+            <a:r>
+              <a:rPr kumimoji="1" lang="en-US" altLang="ja-JP" dirty="0">
+                <a:latin typeface="Consolas" panose="020B0609020204030204" pitchFamily="49" charset="0"/>
+              </a:rPr>
+              <a:t>(</a:t>
+            </a:r>
+            <a:r>
+              <a:rPr kumimoji="1" lang="ja-JP" altLang="en-US" dirty="0">
+                <a:latin typeface="Consolas" panose="020B0609020204030204" pitchFamily="49" charset="0"/>
+              </a:rPr>
+              <a:t>へんこう</a:t>
+            </a:r>
+            <a:r>
+              <a:rPr kumimoji="1" lang="en-US" altLang="ja-JP" dirty="0">
+                <a:latin typeface="Consolas" panose="020B0609020204030204" pitchFamily="49" charset="0"/>
+              </a:rPr>
+              <a:t>)</a:t>
+            </a:r>
+            <a:r>
+              <a:rPr kumimoji="1" lang="ja-JP" altLang="en-US" dirty="0">
+                <a:latin typeface="Consolas" panose="020B0609020204030204" pitchFamily="49" charset="0"/>
+              </a:rPr>
+              <a:t> して</a:t>
+            </a:r>
+            <a:endParaRPr kumimoji="1" lang="en-US" altLang="ja-JP" dirty="0">
+              <a:latin typeface="Consolas" panose="020B0609020204030204" pitchFamily="49" charset="0"/>
+            </a:endParaRPr>
+          </a:p>
+          <a:p>
+            <a:r>
+              <a:rPr lang="ja-JP" altLang="en-US" dirty="0"/>
+              <a:t>「</a:t>
+            </a:r>
+            <a:r>
+              <a:rPr lang="en-US" altLang="ja-JP" dirty="0"/>
+              <a:t>body</a:t>
+            </a:r>
+            <a:r>
+              <a:rPr lang="ja-JP" altLang="en-US" dirty="0"/>
+              <a:t>」の中</a:t>
+            </a:r>
+            <a:r>
+              <a:rPr lang="en-US" altLang="ja-JP" dirty="0"/>
+              <a:t>(</a:t>
+            </a:r>
+            <a:r>
+              <a:rPr lang="ja-JP" altLang="en-US" dirty="0"/>
+              <a:t>なか</a:t>
+            </a:r>
+            <a:r>
+              <a:rPr lang="en-US" altLang="ja-JP" dirty="0"/>
+              <a:t>)</a:t>
+            </a:r>
+            <a:r>
+              <a:rPr lang="ja-JP" altLang="en-US" dirty="0"/>
+              <a:t> の</a:t>
+            </a:r>
+            <a:r>
+              <a:rPr kumimoji="1" lang="ja-JP" altLang="en-US" dirty="0"/>
+              <a:t>文字</a:t>
+            </a:r>
+            <a:r>
+              <a:rPr lang="en-US" altLang="ja-JP" dirty="0"/>
+              <a:t>(</a:t>
+            </a:r>
+            <a:r>
+              <a:rPr lang="ja-JP" altLang="en-US" dirty="0"/>
+              <a:t>もじ</a:t>
+            </a:r>
+            <a:r>
+              <a:rPr kumimoji="1" lang="en-US" altLang="ja-JP" dirty="0"/>
+              <a:t>)</a:t>
+            </a:r>
+            <a:r>
+              <a:rPr kumimoji="1" lang="ja-JP" altLang="en-US" dirty="0"/>
+              <a:t>を赤</a:t>
+            </a:r>
+            <a:r>
+              <a:rPr kumimoji="1" lang="en-US" altLang="ja-JP" dirty="0"/>
+              <a:t>(</a:t>
+            </a:r>
+            <a:r>
+              <a:rPr kumimoji="1" lang="ja-JP" altLang="en-US" dirty="0"/>
+              <a:t>あか</a:t>
+            </a:r>
+            <a:r>
+              <a:rPr kumimoji="1" lang="en-US" altLang="ja-JP" dirty="0"/>
+              <a:t>)</a:t>
+            </a:r>
+            <a:r>
+              <a:rPr kumimoji="1" lang="ja-JP" altLang="en-US" dirty="0"/>
+              <a:t>くします。</a:t>
+            </a:r>
+          </a:p>
+        </p:txBody>
+      </p:sp>
+      <p:pic>
+        <p:nvPicPr>
+          <p:cNvPr id="6" name="図 5">
+            <a:extLst>
+              <a:ext uri="{FF2B5EF4-FFF2-40B4-BE49-F238E27FC236}">
+                <a16:creationId xmlns:a16="http://schemas.microsoft.com/office/drawing/2014/main" id="{E8248525-E175-A6F2-FE19-2F9826D078EE}"/>
+              </a:ext>
+            </a:extLst>
+          </p:cNvPr>
+          <p:cNvPicPr>
+            <a:picLocks noChangeAspect="1"/>
+          </p:cNvPicPr>
+          <p:nvPr/>
+        </p:nvPicPr>
+        <p:blipFill>
+          <a:blip r:embed="rId2"/>
+          <a:stretch>
+            <a:fillRect/>
+          </a:stretch>
+        </p:blipFill>
+        <p:spPr>
+          <a:xfrm>
+            <a:off x="1287618" y="3841980"/>
+            <a:ext cx="4277322" cy="2095792"/>
+          </a:xfrm>
+          <a:prstGeom prst="rect">
+            <a:avLst/>
+          </a:prstGeom>
+        </p:spPr>
+      </p:pic>
+      <p:pic>
+        <p:nvPicPr>
+          <p:cNvPr id="10" name="図 9">
+            <a:extLst>
+              <a:ext uri="{FF2B5EF4-FFF2-40B4-BE49-F238E27FC236}">
+                <a16:creationId xmlns:a16="http://schemas.microsoft.com/office/drawing/2014/main" id="{C8B35828-F30F-8A83-E4DF-B7E94854FF2B}"/>
+              </a:ext>
+            </a:extLst>
+          </p:cNvPr>
+          <p:cNvPicPr>
+            <a:picLocks noChangeAspect="1"/>
+          </p:cNvPicPr>
+          <p:nvPr/>
+        </p:nvPicPr>
+        <p:blipFill>
+          <a:blip r:embed="rId3"/>
+          <a:stretch>
+            <a:fillRect/>
+          </a:stretch>
+        </p:blipFill>
+        <p:spPr>
+          <a:xfrm>
+            <a:off x="6798534" y="3782750"/>
+            <a:ext cx="4105848" cy="2095792"/>
+          </a:xfrm>
+          <a:prstGeom prst="rect">
+            <a:avLst/>
+          </a:prstGeom>
+        </p:spPr>
+      </p:pic>
+      <p:sp>
+        <p:nvSpPr>
+          <p:cNvPr id="11" name="矢印: 右 10">
+            <a:extLst>
+              <a:ext uri="{FF2B5EF4-FFF2-40B4-BE49-F238E27FC236}">
+                <a16:creationId xmlns:a16="http://schemas.microsoft.com/office/drawing/2014/main" id="{ECCCD168-F171-8B0A-55A5-00773E38266B}"/>
+              </a:ext>
+            </a:extLst>
+          </p:cNvPr>
+          <p:cNvSpPr/>
+          <p:nvPr/>
+        </p:nvSpPr>
+        <p:spPr>
+          <a:xfrm>
+            <a:off x="5564940" y="4595056"/>
+            <a:ext cx="531060" cy="317232"/>
+          </a:xfrm>
+          <a:prstGeom prst="rightArrow">
+            <a:avLst/>
+          </a:prstGeom>
+        </p:spPr>
+        <p:style>
+          <a:lnRef idx="2">
+            <a:schemeClr val="accent1">
+              <a:shade val="15000"/>
+            </a:schemeClr>
+          </a:lnRef>
+          <a:fillRef idx="1">
+            <a:schemeClr val="accent1"/>
+          </a:fillRef>
+          <a:effectRef idx="0">
+            <a:schemeClr val="accent1"/>
+          </a:effectRef>
+          <a:fontRef idx="minor">
+            <a:schemeClr val="lt1"/>
+          </a:fontRef>
+        </p:style>
+        <p:txBody>
+          <a:bodyPr rtlCol="0" anchor="ctr"/>
+          <a:lstStyle/>
+          <a:p>
+            <a:pPr algn="ctr"/>
+            <a:endParaRPr kumimoji="1" lang="ja-JP" altLang="en-US"/>
+          </a:p>
+        </p:txBody>
+      </p:sp>
+      <p:sp>
+        <p:nvSpPr>
+          <p:cNvPr id="12" name="テキスト ボックス 11">
+            <a:extLst>
+              <a:ext uri="{FF2B5EF4-FFF2-40B4-BE49-F238E27FC236}">
+                <a16:creationId xmlns:a16="http://schemas.microsoft.com/office/drawing/2014/main" id="{35E03359-680F-287F-3949-0B20059B694B}"/>
+              </a:ext>
+            </a:extLst>
+          </p:cNvPr>
+          <p:cNvSpPr txBox="1"/>
+          <p:nvPr/>
+        </p:nvSpPr>
+        <p:spPr>
+          <a:xfrm>
+            <a:off x="771524" y="386121"/>
+            <a:ext cx="1800493" cy="369332"/>
+          </a:xfrm>
+          <a:prstGeom prst="rect">
+            <a:avLst/>
+          </a:prstGeom>
+          <a:noFill/>
+        </p:spPr>
+        <p:txBody>
+          <a:bodyPr wrap="none" rtlCol="0">
+            <a:spAutoFit/>
+          </a:bodyPr>
+          <a:lstStyle/>
+          <a:p>
+            <a:r>
+              <a:rPr kumimoji="1" lang="en-US" altLang="ja-JP" b="1" dirty="0"/>
+              <a:t>JavaScript</a:t>
+            </a:r>
+            <a:r>
+              <a:rPr kumimoji="1" lang="ja-JP" altLang="en-US" b="1" dirty="0"/>
+              <a:t>の例</a:t>
+            </a:r>
+          </a:p>
+        </p:txBody>
+      </p:sp>
+    </p:spTree>
+    <p:extLst>
+      <p:ext uri="{BB962C8B-B14F-4D97-AF65-F5344CB8AC3E}">
+        <p14:creationId xmlns:p14="http://schemas.microsoft.com/office/powerpoint/2010/main" val="774859858"/>
+      </p:ext>
+    </p:extLst>
+  </p:cSld>
+  <p:clrMapOvr>
+    <a:masterClrMapping/>
+  </p:clrMapOvr>
+</p:sld>
+</file>
+
+<file path=ppt/slides/slide11.xml><?xml version="1.0" encoding="utf-8"?>
+<p:sld xmlns:a="http://schemas.openxmlformats.org/drawingml/2006/main" xmlns:r="http://schemas.openxmlformats.org/officeDocument/2006/relationships" xmlns:p="http://schemas.openxmlformats.org/presentationml/2006/main">
+  <p:cSld>
+    <p:spTree>
+      <p:nvGrpSpPr>
+        <p:cNvPr id="1" name="">
+          <a:extLst>
+            <a:ext uri="{FF2B5EF4-FFF2-40B4-BE49-F238E27FC236}">
+              <a16:creationId xmlns:a16="http://schemas.microsoft.com/office/drawing/2014/main" id="{8B63329D-6D45-7F87-CFF4-D1227630C0F3}"/>
+            </a:ext>
+          </a:extLst>
+        </p:cNvPr>
+        <p:cNvGrpSpPr/>
+        <p:nvPr/>
+      </p:nvGrpSpPr>
+      <p:grpSpPr>
+        <a:xfrm>
+          <a:off x="0" y="0"/>
+          <a:ext cx="0" cy="0"/>
+          <a:chOff x="0" y="0"/>
+          <a:chExt cx="0" cy="0"/>
+        </a:xfrm>
+      </p:grpSpPr>
+      <p:sp>
+        <p:nvSpPr>
+          <p:cNvPr id="2" name="テキスト ボックス 1">
+            <a:extLst>
+              <a:ext uri="{FF2B5EF4-FFF2-40B4-BE49-F238E27FC236}">
+                <a16:creationId xmlns:a16="http://schemas.microsoft.com/office/drawing/2014/main" id="{7B8128FC-C783-EEC2-5605-E0500C2B380F}"/>
+              </a:ext>
+            </a:extLst>
+          </p:cNvPr>
+          <p:cNvSpPr txBox="1"/>
+          <p:nvPr/>
+        </p:nvSpPr>
+        <p:spPr>
+          <a:xfrm>
+            <a:off x="1279616" y="2767280"/>
+            <a:ext cx="9700091" cy="1938992"/>
+          </a:xfrm>
+          <a:prstGeom prst="rect">
+            <a:avLst/>
+          </a:prstGeom>
+          <a:noFill/>
+        </p:spPr>
+        <p:txBody>
+          <a:bodyPr wrap="none" rtlCol="0">
+            <a:spAutoFit/>
+          </a:bodyPr>
+          <a:lstStyle/>
+          <a:p>
+            <a:r>
+              <a:rPr kumimoji="1" lang="en-US" altLang="ja-JP" sz="4000" dirty="0"/>
+              <a:t>【</a:t>
+            </a:r>
+            <a:r>
+              <a:rPr kumimoji="1" lang="ja-JP" altLang="en-US" sz="4000" dirty="0"/>
+              <a:t>たとえ</a:t>
+            </a:r>
+            <a:r>
+              <a:rPr kumimoji="1" lang="en-US" altLang="ja-JP" sz="4000" dirty="0"/>
+              <a:t>】</a:t>
+            </a:r>
+          </a:p>
+          <a:p>
+            <a:r>
+              <a:rPr kumimoji="1" lang="ja-JP" altLang="en-US" sz="4000" dirty="0"/>
+              <a:t>「機械</a:t>
+            </a:r>
+            <a:r>
+              <a:rPr kumimoji="1" lang="en-US" altLang="ja-JP" sz="4000" dirty="0"/>
+              <a:t>(</a:t>
+            </a:r>
+            <a:r>
+              <a:rPr kumimoji="1" lang="ja-JP" altLang="en-US" sz="4000" dirty="0"/>
+              <a:t>きかい</a:t>
+            </a:r>
+            <a:r>
+              <a:rPr kumimoji="1" lang="en-US" altLang="ja-JP" sz="4000" dirty="0"/>
+              <a:t>)</a:t>
+            </a:r>
+            <a:r>
+              <a:rPr lang="ja-JP" altLang="en-US" sz="4000" dirty="0"/>
+              <a:t>の</a:t>
+            </a:r>
+            <a:r>
+              <a:rPr kumimoji="1" lang="ja-JP" altLang="en-US" sz="4000" dirty="0"/>
+              <a:t>修理</a:t>
+            </a:r>
+            <a:r>
+              <a:rPr kumimoji="1" lang="en-US" altLang="ja-JP" sz="4000" dirty="0"/>
+              <a:t>(</a:t>
+            </a:r>
+            <a:r>
+              <a:rPr kumimoji="1" lang="ja-JP" altLang="en-US" sz="4000" dirty="0"/>
+              <a:t>しゅうり</a:t>
+            </a:r>
+            <a:r>
+              <a:rPr kumimoji="1" lang="en-US" altLang="ja-JP" sz="4000" dirty="0"/>
+              <a:t>)</a:t>
+            </a:r>
+            <a:r>
+              <a:rPr kumimoji="1" lang="ja-JP" altLang="en-US" sz="4000" dirty="0"/>
+              <a:t>をする」</a:t>
+            </a:r>
+            <a:endParaRPr kumimoji="1" lang="en-US" altLang="ja-JP" sz="4000" dirty="0"/>
+          </a:p>
+          <a:p>
+            <a:r>
+              <a:rPr lang="ja-JP" altLang="en-US" sz="4000" dirty="0"/>
+              <a:t>と命令</a:t>
+            </a:r>
+            <a:r>
+              <a:rPr lang="en-US" altLang="ja-JP" sz="4000" dirty="0"/>
+              <a:t>(</a:t>
+            </a:r>
+            <a:r>
+              <a:rPr lang="ja-JP" altLang="en-US" sz="4000" dirty="0"/>
+              <a:t>めいれい</a:t>
+            </a:r>
+            <a:r>
+              <a:rPr lang="en-US" altLang="ja-JP" sz="4000" dirty="0"/>
+              <a:t>)</a:t>
+            </a:r>
+            <a:r>
+              <a:rPr lang="ja-JP" altLang="en-US" sz="4000" dirty="0"/>
+              <a:t>する</a:t>
+            </a:r>
+            <a:endParaRPr kumimoji="1" lang="ja-JP" altLang="en-US" sz="4000" dirty="0"/>
+          </a:p>
+        </p:txBody>
+      </p:sp>
+      <p:sp>
+        <p:nvSpPr>
+          <p:cNvPr id="4" name="テキスト ボックス 3">
+            <a:extLst>
+              <a:ext uri="{FF2B5EF4-FFF2-40B4-BE49-F238E27FC236}">
+                <a16:creationId xmlns:a16="http://schemas.microsoft.com/office/drawing/2014/main" id="{3F3CDD36-AA72-8497-4BBD-CB9ACBBC975C}"/>
+              </a:ext>
+            </a:extLst>
+          </p:cNvPr>
+          <p:cNvSpPr txBox="1"/>
+          <p:nvPr/>
+        </p:nvSpPr>
+        <p:spPr>
+          <a:xfrm>
+            <a:off x="532712" y="391885"/>
+            <a:ext cx="6433171" cy="646331"/>
+          </a:xfrm>
+          <a:prstGeom prst="rect">
+            <a:avLst/>
+          </a:prstGeom>
+          <a:noFill/>
+        </p:spPr>
+        <p:txBody>
+          <a:bodyPr wrap="none" rtlCol="0">
+            <a:spAutoFit/>
+          </a:bodyPr>
+          <a:lstStyle/>
+          <a:p>
+            <a:r>
+              <a:rPr kumimoji="1" lang="en-US" altLang="ja-JP" sz="3600" b="1" dirty="0"/>
+              <a:t>II.</a:t>
+            </a:r>
+            <a:r>
+              <a:rPr kumimoji="1" lang="ja-JP" altLang="en-US" sz="3600" b="1" dirty="0"/>
+              <a:t>メソッドを呼</a:t>
+            </a:r>
+            <a:r>
+              <a:rPr kumimoji="1" lang="en-US" altLang="ja-JP" sz="3600" b="1" dirty="0"/>
+              <a:t>(</a:t>
+            </a:r>
+            <a:r>
+              <a:rPr kumimoji="1" lang="ja-JP" altLang="en-US" sz="3600" b="1" dirty="0"/>
+              <a:t>よ</a:t>
+            </a:r>
+            <a:r>
+              <a:rPr kumimoji="1" lang="en-US" altLang="ja-JP" sz="3600" b="1" dirty="0"/>
+              <a:t>)</a:t>
+            </a:r>
+            <a:r>
+              <a:rPr kumimoji="1" lang="ja-JP" altLang="en-US" sz="3600" b="1" dirty="0"/>
+              <a:t>び出</a:t>
+            </a:r>
+            <a:r>
+              <a:rPr kumimoji="1" lang="en-US" altLang="ja-JP" sz="3600" b="1" dirty="0"/>
+              <a:t>(</a:t>
+            </a:r>
+            <a:r>
+              <a:rPr kumimoji="1" lang="ja-JP" altLang="en-US" sz="3600" b="1" dirty="0"/>
+              <a:t>だ</a:t>
+            </a:r>
+            <a:r>
+              <a:rPr kumimoji="1" lang="en-US" altLang="ja-JP" sz="3600" b="1" dirty="0"/>
+              <a:t>)</a:t>
+            </a:r>
+            <a:r>
+              <a:rPr kumimoji="1" lang="ja-JP" altLang="en-US" sz="3600" b="1" dirty="0"/>
+              <a:t>す</a:t>
+            </a:r>
+          </a:p>
+        </p:txBody>
+      </p:sp>
+    </p:spTree>
+    <p:extLst>
+      <p:ext uri="{BB962C8B-B14F-4D97-AF65-F5344CB8AC3E}">
+        <p14:creationId xmlns:p14="http://schemas.microsoft.com/office/powerpoint/2010/main" val="4182217032"/>
+      </p:ext>
+    </p:extLst>
+  </p:cSld>
+  <p:clrMapOvr>
+    <a:masterClrMapping/>
+  </p:clrMapOvr>
+</p:sld>
+</file>
+
+<file path=ppt/slides/slide12.xml><?xml version="1.0" encoding="utf-8"?>
+<p:sld xmlns:a="http://schemas.openxmlformats.org/drawingml/2006/main" xmlns:r="http://schemas.openxmlformats.org/officeDocument/2006/relationships" xmlns:p="http://schemas.openxmlformats.org/presentationml/2006/main">
+  <p:cSld>
+    <p:spTree>
+      <p:nvGrpSpPr>
+        <p:cNvPr id="1" name="">
+          <a:extLst>
+            <a:ext uri="{FF2B5EF4-FFF2-40B4-BE49-F238E27FC236}">
+              <a16:creationId xmlns:a16="http://schemas.microsoft.com/office/drawing/2014/main" id="{67CFF450-2D2C-D654-DC6E-77E88011A724}"/>
+            </a:ext>
+          </a:extLst>
+        </p:cNvPr>
+        <p:cNvGrpSpPr/>
+        <p:nvPr/>
+      </p:nvGrpSpPr>
+      <p:grpSpPr>
+        <a:xfrm>
+          <a:off x="0" y="0"/>
+          <a:ext cx="0" cy="0"/>
+          <a:chOff x="0" y="0"/>
+          <a:chExt cx="0" cy="0"/>
+        </a:xfrm>
+      </p:grpSpPr>
+      <p:pic>
+        <p:nvPicPr>
+          <p:cNvPr id="5" name="図 4" descr="挿絵 が含まれている画像&#10;&#10;AI によって生成されたコンテンツは間違っている可能性があります。">
+            <a:extLst>
+              <a:ext uri="{FF2B5EF4-FFF2-40B4-BE49-F238E27FC236}">
+                <a16:creationId xmlns:a16="http://schemas.microsoft.com/office/drawing/2014/main" id="{D653FB27-E6D6-F6DA-BD8F-110223400052}"/>
+              </a:ext>
+            </a:extLst>
+          </p:cNvPr>
+          <p:cNvPicPr>
+            <a:picLocks noChangeAspect="1"/>
+          </p:cNvPicPr>
+          <p:nvPr/>
+        </p:nvPicPr>
+        <p:blipFill>
+          <a:blip r:embed="rId2">
+            <a:extLst>
+              <a:ext uri="{28A0092B-C50C-407E-A947-70E740481C1C}">
+                <a14:useLocalDpi xmlns:a14="http://schemas.microsoft.com/office/drawing/2010/main" val="0"/>
+              </a:ext>
+            </a:extLst>
+          </a:blip>
+          <a:stretch>
+            <a:fillRect/>
+          </a:stretch>
+        </p:blipFill>
+        <p:spPr>
+          <a:xfrm>
+            <a:off x="3810000" y="0"/>
+            <a:ext cx="4572000" cy="6858000"/>
+          </a:xfrm>
+          <a:prstGeom prst="rect">
+            <a:avLst/>
+          </a:prstGeom>
+        </p:spPr>
+      </p:pic>
+      <p:graphicFrame>
+        <p:nvGraphicFramePr>
+          <p:cNvPr id="2" name="表 1">
+            <a:extLst>
+              <a:ext uri="{FF2B5EF4-FFF2-40B4-BE49-F238E27FC236}">
+                <a16:creationId xmlns:a16="http://schemas.microsoft.com/office/drawing/2014/main" id="{4F879B7A-13D3-8D7B-3605-8A908DF48E10}"/>
+              </a:ext>
+            </a:extLst>
+          </p:cNvPr>
+          <p:cNvGraphicFramePr>
+            <a:graphicFrameLocks noGrp="1"/>
+          </p:cNvGraphicFramePr>
+          <p:nvPr/>
+        </p:nvGraphicFramePr>
+        <p:xfrm>
+          <a:off x="7805057" y="728334"/>
+          <a:ext cx="3992335" cy="3877222"/>
+        </p:xfrm>
+        <a:graphic>
+          <a:graphicData uri="http://schemas.openxmlformats.org/drawingml/2006/table">
+            <a:tbl>
+              <a:tblPr firstRow="1" bandRow="1">
+                <a:tableStyleId>{5C22544A-7EE6-4342-B048-85BDC9FD1C3A}</a:tableStyleId>
+              </a:tblPr>
+              <a:tblGrid>
+                <a:gridCol w="3992335">
+                  <a:extLst>
+                    <a:ext uri="{9D8B030D-6E8A-4147-A177-3AD203B41FA5}">
+                      <a16:colId xmlns:a16="http://schemas.microsoft.com/office/drawing/2014/main" val="1828524323"/>
+                    </a:ext>
+                  </a:extLst>
+                </a:gridCol>
+              </a:tblGrid>
+              <a:tr h="1118724">
+                <a:tc>
+                  <a:txBody>
+                    <a:bodyPr/>
+                    <a:lstStyle/>
+                    <a:p>
+                      <a:r>
+                        <a:rPr kumimoji="1" lang="ja-JP" altLang="en-US" dirty="0"/>
+                        <a:t>プロパティ</a:t>
+                      </a:r>
+                      <a:endParaRPr kumimoji="1" lang="en-US" altLang="ja-JP" dirty="0"/>
+                    </a:p>
+                    <a:p>
+                      <a:pPr marL="285750" indent="-285750">
+                        <a:buFont typeface="Arial" panose="020B0604020202020204" pitchFamily="34" charset="0"/>
+                        <a:buChar char="•"/>
+                      </a:pPr>
+                      <a:r>
+                        <a:rPr kumimoji="1" lang="ja-JP" altLang="en-US" sz="1400" dirty="0">
+                          <a:latin typeface="+mj-ea"/>
+                          <a:ea typeface="+mj-ea"/>
+                        </a:rPr>
+                        <a:t>オブジェクトの様子</a:t>
+                      </a:r>
+                      <a:endParaRPr kumimoji="1" lang="en-US" altLang="ja-JP" sz="1400" dirty="0">
+                        <a:latin typeface="+mj-ea"/>
+                        <a:ea typeface="+mj-ea"/>
+                      </a:endParaRPr>
+                    </a:p>
+                    <a:p>
+                      <a:pPr marL="285750" indent="-285750">
+                        <a:buFont typeface="Arial" panose="020B0604020202020204" pitchFamily="34" charset="0"/>
+                        <a:buChar char="•"/>
+                      </a:pPr>
+                      <a:r>
+                        <a:rPr kumimoji="1" lang="ja-JP" altLang="en-US" sz="1400" dirty="0">
+                          <a:latin typeface="+mj-ea"/>
+                          <a:ea typeface="+mj-ea"/>
+                        </a:rPr>
+                        <a:t>オブジェクトの持ち物</a:t>
+                      </a:r>
+                      <a:endParaRPr kumimoji="1" lang="en-US" altLang="ja-JP" sz="1400" dirty="0">
+                        <a:latin typeface="+mj-ea"/>
+                        <a:ea typeface="+mj-ea"/>
+                      </a:endParaRPr>
+                    </a:p>
+                    <a:p>
+                      <a:pPr marL="0" indent="0" algn="r">
+                        <a:buFontTx/>
+                        <a:buNone/>
+                      </a:pPr>
+                      <a:r>
+                        <a:rPr kumimoji="1" lang="ja-JP" altLang="en-US" sz="1400" dirty="0">
+                          <a:latin typeface="+mj-ea"/>
+                          <a:ea typeface="+mj-ea"/>
+                        </a:rPr>
+                        <a:t>など</a:t>
+                      </a:r>
+                    </a:p>
+                  </a:txBody>
+                  <a:tcPr/>
+                </a:tc>
+                <a:extLst>
+                  <a:ext uri="{0D108BD9-81ED-4DB2-BD59-A6C34878D82A}">
+                    <a16:rowId xmlns:a16="http://schemas.microsoft.com/office/drawing/2014/main" val="3101971193"/>
+                  </a:ext>
+                </a:extLst>
+              </a:tr>
+              <a:tr h="2758498">
+                <a:tc>
+                  <a:txBody>
+                    <a:bodyPr/>
+                    <a:lstStyle/>
+                    <a:p>
+                      <a:r>
+                        <a:rPr kumimoji="1" lang="ja-JP" altLang="en-US" dirty="0"/>
+                        <a:t>着ている服の色：</a:t>
+                      </a:r>
+                      <a:r>
+                        <a:rPr kumimoji="1" lang="ja-JP" altLang="en-US" b="1" dirty="0">
+                          <a:solidFill>
+                            <a:srgbClr val="FF0000"/>
+                          </a:solidFill>
+                        </a:rPr>
+                        <a:t>赤</a:t>
+                      </a:r>
+                      <a:endParaRPr kumimoji="1" lang="en-US" altLang="ja-JP" b="1" dirty="0">
+                        <a:solidFill>
+                          <a:srgbClr val="FF0000"/>
+                        </a:solidFill>
+                      </a:endParaRPr>
+                    </a:p>
+                    <a:p>
+                      <a:r>
+                        <a:rPr kumimoji="1" lang="ja-JP" altLang="en-US" dirty="0"/>
+                        <a:t>履いている靴の色：ベージュ</a:t>
+                      </a:r>
+                      <a:endParaRPr kumimoji="1" lang="en-US" altLang="ja-JP" dirty="0"/>
+                    </a:p>
+                    <a:p>
+                      <a:r>
+                        <a:rPr kumimoji="1" lang="ja-JP" altLang="en-US" dirty="0"/>
+                        <a:t>髪：ショートヘア</a:t>
+                      </a:r>
+                      <a:endParaRPr kumimoji="1" lang="en-US" altLang="ja-JP" dirty="0"/>
+                    </a:p>
+                    <a:p>
+                      <a:r>
+                        <a:rPr kumimoji="1" lang="ja-JP" altLang="en-US" dirty="0"/>
+                        <a:t>カバンの種類：ショルダーバッグ</a:t>
+                      </a:r>
+                    </a:p>
+                  </a:txBody>
+                  <a:tcPr/>
+                </a:tc>
+                <a:extLst>
+                  <a:ext uri="{0D108BD9-81ED-4DB2-BD59-A6C34878D82A}">
+                    <a16:rowId xmlns:a16="http://schemas.microsoft.com/office/drawing/2014/main" val="1998050814"/>
+                  </a:ext>
+                </a:extLst>
+              </a:tr>
+            </a:tbl>
+          </a:graphicData>
+        </a:graphic>
+      </p:graphicFrame>
+      <p:graphicFrame>
+        <p:nvGraphicFramePr>
+          <p:cNvPr id="3" name="表 2">
+            <a:extLst>
+              <a:ext uri="{FF2B5EF4-FFF2-40B4-BE49-F238E27FC236}">
+                <a16:creationId xmlns:a16="http://schemas.microsoft.com/office/drawing/2014/main" id="{B1667707-AE54-C4A4-BB63-50ADC90C0E10}"/>
+              </a:ext>
+            </a:extLst>
+          </p:cNvPr>
+          <p:cNvGraphicFramePr>
+            <a:graphicFrameLocks noGrp="1"/>
+          </p:cNvGraphicFramePr>
+          <p:nvPr>
+            <p:extLst>
+              <p:ext uri="{D42A27DB-BD31-4B8C-83A1-F6EECF244321}">
+                <p14:modId xmlns:p14="http://schemas.microsoft.com/office/powerpoint/2010/main" val="524096390"/>
+              </p:ext>
+            </p:extLst>
+          </p:nvPr>
+        </p:nvGraphicFramePr>
+        <p:xfrm>
+          <a:off x="801615" y="728334"/>
+          <a:ext cx="3009783" cy="3877222"/>
+        </p:xfrm>
+        <a:graphic>
+          <a:graphicData uri="http://schemas.openxmlformats.org/drawingml/2006/table">
+            <a:tbl>
+              <a:tblPr firstRow="1" bandRow="1">
+                <a:tableStyleId>{5C22544A-7EE6-4342-B048-85BDC9FD1C3A}</a:tableStyleId>
+              </a:tblPr>
+              <a:tblGrid>
+                <a:gridCol w="3009783">
+                  <a:extLst>
+                    <a:ext uri="{9D8B030D-6E8A-4147-A177-3AD203B41FA5}">
+                      <a16:colId xmlns:a16="http://schemas.microsoft.com/office/drawing/2014/main" val="1828524323"/>
+                    </a:ext>
+                  </a:extLst>
+                </a:gridCol>
+              </a:tblGrid>
+              <a:tr h="1118724">
+                <a:tc>
+                  <a:txBody>
+                    <a:bodyPr/>
+                    <a:lstStyle/>
+                    <a:p>
+                      <a:r>
+                        <a:rPr kumimoji="1" lang="ja-JP" altLang="en-US" dirty="0"/>
+                        <a:t>メソッド</a:t>
+                      </a:r>
+                      <a:endParaRPr kumimoji="1" lang="en-US" altLang="ja-JP" dirty="0"/>
+                    </a:p>
+                    <a:p>
+                      <a:pPr marL="285750" indent="-285750">
+                        <a:buFont typeface="Arial" panose="020B0604020202020204" pitchFamily="34" charset="0"/>
+                        <a:buChar char="•"/>
+                      </a:pPr>
+                      <a:r>
+                        <a:rPr kumimoji="1" lang="ja-JP" altLang="en-US" sz="1400" dirty="0">
+                          <a:latin typeface="+mj-ea"/>
+                          <a:ea typeface="+mj-ea"/>
+                        </a:rPr>
+                        <a:t>オブジェクトの動作</a:t>
+                      </a:r>
+                    </a:p>
+                  </a:txBody>
+                  <a:tcPr/>
+                </a:tc>
+                <a:extLst>
+                  <a:ext uri="{0D108BD9-81ED-4DB2-BD59-A6C34878D82A}">
+                    <a16:rowId xmlns:a16="http://schemas.microsoft.com/office/drawing/2014/main" val="3101971193"/>
+                  </a:ext>
+                </a:extLst>
+              </a:tr>
+              <a:tr h="2758498">
+                <a:tc>
+                  <a:txBody>
+                    <a:bodyPr/>
+                    <a:lstStyle/>
+                    <a:p>
+                      <a:pPr marL="0" marR="0" lvl="0" indent="0" algn="l" defTabSz="914400" rtl="0" eaLnBrk="1" fontAlgn="auto" latinLnBrk="0" hangingPunct="1">
+                        <a:lnSpc>
+                          <a:spcPct val="100000"/>
+                        </a:lnSpc>
+                        <a:spcBef>
+                          <a:spcPts val="0"/>
+                        </a:spcBef>
+                        <a:spcAft>
+                          <a:spcPts val="0"/>
+                        </a:spcAft>
+                        <a:buClrTx/>
+                        <a:buSzTx/>
+                        <a:buFontTx/>
+                        <a:buNone/>
+                        <a:tabLst/>
+                        <a:defRPr/>
+                      </a:pPr>
+                      <a:r>
+                        <a:rPr kumimoji="1" lang="ja-JP" altLang="en-US" b="1" dirty="0">
+                          <a:solidFill>
+                            <a:srgbClr val="FF0000"/>
+                          </a:solidFill>
+                        </a:rPr>
+                        <a:t>機械の修理をする</a:t>
+                      </a:r>
+                      <a:endParaRPr kumimoji="1" lang="en-US" altLang="ja-JP" b="1" dirty="0">
+                        <a:solidFill>
+                          <a:srgbClr val="FF0000"/>
+                        </a:solidFill>
+                      </a:endParaRPr>
+                    </a:p>
+                    <a:p>
+                      <a:pPr marL="0" marR="0" lvl="0" indent="0" algn="l" defTabSz="914400" rtl="0" eaLnBrk="1" fontAlgn="auto" latinLnBrk="0" hangingPunct="1">
+                        <a:lnSpc>
+                          <a:spcPct val="100000"/>
+                        </a:lnSpc>
+                        <a:spcBef>
+                          <a:spcPts val="0"/>
+                        </a:spcBef>
+                        <a:spcAft>
+                          <a:spcPts val="0"/>
+                        </a:spcAft>
+                        <a:buClrTx/>
+                        <a:buSzTx/>
+                        <a:buFontTx/>
+                        <a:buNone/>
+                        <a:tabLst/>
+                        <a:defRPr/>
+                      </a:pPr>
+                      <a:r>
+                        <a:rPr kumimoji="1" lang="ja-JP" altLang="en-US" dirty="0"/>
+                        <a:t>カバンから中身を出す</a:t>
+                      </a:r>
+                      <a:endParaRPr kumimoji="1" lang="en-US" altLang="ja-JP" dirty="0"/>
+                    </a:p>
+                    <a:p>
+                      <a:pPr marL="0" marR="0" lvl="0" indent="0" algn="l" defTabSz="914400" rtl="0" eaLnBrk="1" fontAlgn="auto" latinLnBrk="0" hangingPunct="1">
+                        <a:lnSpc>
+                          <a:spcPct val="100000"/>
+                        </a:lnSpc>
+                        <a:spcBef>
+                          <a:spcPts val="0"/>
+                        </a:spcBef>
+                        <a:spcAft>
+                          <a:spcPts val="0"/>
+                        </a:spcAft>
+                        <a:buClrTx/>
+                        <a:buSzTx/>
+                        <a:buFontTx/>
+                        <a:buNone/>
+                        <a:tabLst/>
+                        <a:defRPr/>
+                      </a:pPr>
+                      <a:r>
+                        <a:rPr kumimoji="1" lang="ja-JP" altLang="en-US" dirty="0"/>
+                        <a:t>カバンにものを入れる</a:t>
+                      </a:r>
+                    </a:p>
+                    <a:p>
+                      <a:endParaRPr kumimoji="1" lang="ja-JP" altLang="en-US" dirty="0"/>
+                    </a:p>
+                  </a:txBody>
+                  <a:tcPr/>
+                </a:tc>
+                <a:extLst>
+                  <a:ext uri="{0D108BD9-81ED-4DB2-BD59-A6C34878D82A}">
+                    <a16:rowId xmlns:a16="http://schemas.microsoft.com/office/drawing/2014/main" val="1998050814"/>
+                  </a:ext>
+                </a:extLst>
+              </a:tr>
+            </a:tbl>
+          </a:graphicData>
+        </a:graphic>
+      </p:graphicFrame>
+    </p:spTree>
+    <p:extLst>
+      <p:ext uri="{BB962C8B-B14F-4D97-AF65-F5344CB8AC3E}">
+        <p14:creationId xmlns:p14="http://schemas.microsoft.com/office/powerpoint/2010/main" val="3263699481"/>
+      </p:ext>
+    </p:extLst>
+  </p:cSld>
+  <p:clrMapOvr>
+    <a:masterClrMapping/>
+  </p:clrMapOvr>
+</p:sld>
+</file>
+
+<file path=ppt/slides/slide13.xml><?xml version="1.0" encoding="utf-8"?>
+<p:sld xmlns:a="http://schemas.openxmlformats.org/drawingml/2006/main" xmlns:r="http://schemas.openxmlformats.org/officeDocument/2006/relationships" xmlns:p="http://schemas.openxmlformats.org/presentationml/2006/main">
+  <p:cSld>
+    <p:spTree>
+      <p:nvGrpSpPr>
         <p:cNvPr id="1" name="">
           <a:extLst>
             <a:ext uri="{FF2B5EF4-FFF2-40B4-BE49-F238E27FC236}">
@@ -4493,6 +6547,984 @@
           <a:chExt cx="0" cy="0"/>
         </a:xfrm>
       </p:grpSpPr>
+      <p:sp>
+        <p:nvSpPr>
+          <p:cNvPr id="2" name="テキスト ボックス 1">
+            <a:extLst>
+              <a:ext uri="{FF2B5EF4-FFF2-40B4-BE49-F238E27FC236}">
+                <a16:creationId xmlns:a16="http://schemas.microsoft.com/office/drawing/2014/main" id="{F26D70B1-2A4B-E49C-B903-4F89ACB6DE21}"/>
+              </a:ext>
+            </a:extLst>
+          </p:cNvPr>
+          <p:cNvSpPr txBox="1"/>
+          <p:nvPr/>
+        </p:nvSpPr>
+        <p:spPr>
+          <a:xfrm>
+            <a:off x="532712" y="391885"/>
+            <a:ext cx="5522666" cy="646331"/>
+          </a:xfrm>
+          <a:prstGeom prst="rect">
+            <a:avLst/>
+          </a:prstGeom>
+          <a:noFill/>
+        </p:spPr>
+        <p:txBody>
+          <a:bodyPr wrap="none" rtlCol="0">
+            <a:spAutoFit/>
+          </a:bodyPr>
+          <a:lstStyle/>
+          <a:p>
+            <a:r>
+              <a:rPr lang="ja-JP" altLang="en-US" sz="3600" b="1" dirty="0"/>
+              <a:t>復習</a:t>
+            </a:r>
+            <a:r>
+              <a:rPr kumimoji="1" lang="en-US" altLang="ja-JP" sz="3600" b="1" dirty="0"/>
+              <a:t>. </a:t>
+            </a:r>
+            <a:r>
+              <a:rPr kumimoji="1" lang="ja-JP" altLang="en-US" sz="3600" b="1" dirty="0"/>
+              <a:t>オブジェクトとは？</a:t>
+            </a:r>
+          </a:p>
+        </p:txBody>
+      </p:sp>
+      <p:pic>
+        <p:nvPicPr>
+          <p:cNvPr id="3" name="図 2" descr="ゲームのキャラクター&#10;&#10;AI によって生成されたコンテンツは間違っている可能性があります。">
+            <a:extLst>
+              <a:ext uri="{FF2B5EF4-FFF2-40B4-BE49-F238E27FC236}">
+                <a16:creationId xmlns:a16="http://schemas.microsoft.com/office/drawing/2014/main" id="{13F1885D-CBEC-87C4-1C69-BDB05F9E144D}"/>
+              </a:ext>
+            </a:extLst>
+          </p:cNvPr>
+          <p:cNvPicPr>
+            <a:picLocks noChangeAspect="1"/>
+          </p:cNvPicPr>
+          <p:nvPr/>
+        </p:nvPicPr>
+        <p:blipFill>
+          <a:blip r:embed="rId3">
+            <a:extLst>
+              <a:ext uri="{28A0092B-C50C-407E-A947-70E740481C1C}">
+                <a14:useLocalDpi xmlns:a14="http://schemas.microsoft.com/office/drawing/2010/main" val="0"/>
+              </a:ext>
+            </a:extLst>
+          </a:blip>
+          <a:stretch>
+            <a:fillRect/>
+          </a:stretch>
+        </p:blipFill>
+        <p:spPr>
+          <a:xfrm>
+            <a:off x="4905375" y="1228725"/>
+            <a:ext cx="2381250" cy="4286250"/>
+          </a:xfrm>
+          <a:prstGeom prst="rect">
+            <a:avLst/>
+          </a:prstGeom>
+        </p:spPr>
+      </p:pic>
+    </p:spTree>
+    <p:extLst>
+      <p:ext uri="{BB962C8B-B14F-4D97-AF65-F5344CB8AC3E}">
+        <p14:creationId xmlns:p14="http://schemas.microsoft.com/office/powerpoint/2010/main" val="1791391969"/>
+      </p:ext>
+    </p:extLst>
+  </p:cSld>
+  <p:clrMapOvr>
+    <a:masterClrMapping/>
+  </p:clrMapOvr>
+</p:sld>
+</file>
+
+<file path=ppt/slides/slide3.xml><?xml version="1.0" encoding="utf-8"?>
+<p:sld xmlns:a="http://schemas.openxmlformats.org/drawingml/2006/main" xmlns:r="http://schemas.openxmlformats.org/officeDocument/2006/relationships" xmlns:p="http://schemas.openxmlformats.org/presentationml/2006/main">
+  <p:cSld>
+    <p:spTree>
+      <p:nvGrpSpPr>
+        <p:cNvPr id="1" name="">
+          <a:extLst>
+            <a:ext uri="{FF2B5EF4-FFF2-40B4-BE49-F238E27FC236}">
+              <a16:creationId xmlns:a16="http://schemas.microsoft.com/office/drawing/2014/main" id="{304ED8B6-5A8C-B47F-4B82-845E4D8CAA98}"/>
+            </a:ext>
+          </a:extLst>
+        </p:cNvPr>
+        <p:cNvGrpSpPr/>
+        <p:nvPr/>
+      </p:nvGrpSpPr>
+      <p:grpSpPr>
+        <a:xfrm>
+          <a:off x="0" y="0"/>
+          <a:ext cx="0" cy="0"/>
+          <a:chOff x="0" y="0"/>
+          <a:chExt cx="0" cy="0"/>
+        </a:xfrm>
+      </p:grpSpPr>
+      <p:sp>
+        <p:nvSpPr>
+          <p:cNvPr id="4" name="吹き出し: 円形 3">
+            <a:extLst>
+              <a:ext uri="{FF2B5EF4-FFF2-40B4-BE49-F238E27FC236}">
+                <a16:creationId xmlns:a16="http://schemas.microsoft.com/office/drawing/2014/main" id="{1CB185F5-1410-683C-385B-278E90D55837}"/>
+              </a:ext>
+            </a:extLst>
+          </p:cNvPr>
+          <p:cNvSpPr/>
+          <p:nvPr/>
+        </p:nvSpPr>
+        <p:spPr>
+          <a:xfrm>
+            <a:off x="1657350" y="1420586"/>
+            <a:ext cx="2911929" cy="1575707"/>
+          </a:xfrm>
+          <a:prstGeom prst="wedgeEllipseCallout">
+            <a:avLst>
+              <a:gd name="adj1" fmla="val -84443"/>
+              <a:gd name="adj2" fmla="val -74288"/>
+            </a:avLst>
+          </a:prstGeom>
+        </p:spPr>
+        <p:style>
+          <a:lnRef idx="2">
+            <a:schemeClr val="dk1"/>
+          </a:lnRef>
+          <a:fillRef idx="1">
+            <a:schemeClr val="lt1"/>
+          </a:fillRef>
+          <a:effectRef idx="0">
+            <a:schemeClr val="dk1"/>
+          </a:effectRef>
+          <a:fontRef idx="minor">
+            <a:schemeClr val="dk1"/>
+          </a:fontRef>
+        </p:style>
+        <p:txBody>
+          <a:bodyPr rtlCol="0" anchor="ctr"/>
+          <a:lstStyle/>
+          <a:p>
+            <a:pPr algn="ctr"/>
+            <a:r>
+              <a:rPr kumimoji="1" lang="ja-JP" altLang="en-US" dirty="0"/>
+              <a:t>あのかべ、</a:t>
+            </a:r>
+            <a:r>
+              <a:rPr lang="ja-JP" altLang="en-US" dirty="0"/>
+              <a:t>あか</a:t>
+            </a:r>
+            <a:r>
+              <a:rPr kumimoji="1" lang="ja-JP" altLang="en-US" dirty="0"/>
+              <a:t>く ぬって</a:t>
+            </a:r>
+            <a:r>
+              <a:rPr kumimoji="1" lang="en-US" altLang="ja-JP" dirty="0"/>
+              <a:t>!</a:t>
+            </a:r>
+            <a:endParaRPr kumimoji="1" lang="ja-JP" altLang="en-US" dirty="0"/>
+          </a:p>
+        </p:txBody>
+      </p:sp>
+      <p:pic>
+        <p:nvPicPr>
+          <p:cNvPr id="6" name="図 5" descr="ゲームのキャラクター&#10;&#10;AI によって生成されたコンテンツは間違っている可能性があります。">
+            <a:extLst>
+              <a:ext uri="{FF2B5EF4-FFF2-40B4-BE49-F238E27FC236}">
+                <a16:creationId xmlns:a16="http://schemas.microsoft.com/office/drawing/2014/main" id="{6D7B9754-B3C1-29F0-920F-0BEC947B22EC}"/>
+              </a:ext>
+            </a:extLst>
+          </p:cNvPr>
+          <p:cNvPicPr>
+            <a:picLocks noChangeAspect="1"/>
+          </p:cNvPicPr>
+          <p:nvPr/>
+        </p:nvPicPr>
+        <p:blipFill>
+          <a:blip r:embed="rId3">
+            <a:extLst>
+              <a:ext uri="{28A0092B-C50C-407E-A947-70E740481C1C}">
+                <a14:useLocalDpi xmlns:a14="http://schemas.microsoft.com/office/drawing/2010/main" val="0"/>
+              </a:ext>
+            </a:extLst>
+          </a:blip>
+          <a:stretch>
+            <a:fillRect/>
+          </a:stretch>
+        </p:blipFill>
+        <p:spPr>
+          <a:xfrm>
+            <a:off x="4905375" y="1228725"/>
+            <a:ext cx="2381250" cy="4286250"/>
+          </a:xfrm>
+          <a:prstGeom prst="rect">
+            <a:avLst/>
+          </a:prstGeom>
+        </p:spPr>
+      </p:pic>
+      <p:sp>
+        <p:nvSpPr>
+          <p:cNvPr id="7" name="吹き出し: 円形 6">
+            <a:extLst>
+              <a:ext uri="{FF2B5EF4-FFF2-40B4-BE49-F238E27FC236}">
+                <a16:creationId xmlns:a16="http://schemas.microsoft.com/office/drawing/2014/main" id="{DEDD9E04-762E-151B-28E2-0CD7D42C7B61}"/>
+              </a:ext>
+            </a:extLst>
+          </p:cNvPr>
+          <p:cNvSpPr/>
+          <p:nvPr/>
+        </p:nvSpPr>
+        <p:spPr>
+          <a:xfrm>
+            <a:off x="1592036" y="3861707"/>
+            <a:ext cx="2977243" cy="1575707"/>
+          </a:xfrm>
+          <a:prstGeom prst="wedgeEllipseCallout">
+            <a:avLst>
+              <a:gd name="adj1" fmla="val -80893"/>
+              <a:gd name="adj2" fmla="val 85298"/>
+            </a:avLst>
+          </a:prstGeom>
+          <a:ln>
+            <a:prstDash val="solid"/>
+          </a:ln>
+        </p:spPr>
+        <p:style>
+          <a:lnRef idx="2">
+            <a:schemeClr val="accent1"/>
+          </a:lnRef>
+          <a:fillRef idx="1">
+            <a:schemeClr val="lt1"/>
+          </a:fillRef>
+          <a:effectRef idx="0">
+            <a:schemeClr val="accent1"/>
+          </a:effectRef>
+          <a:fontRef idx="minor">
+            <a:schemeClr val="dk1"/>
+          </a:fontRef>
+        </p:style>
+        <p:txBody>
+          <a:bodyPr rtlCol="0" anchor="ctr"/>
+          <a:lstStyle/>
+          <a:p>
+            <a:pPr algn="ctr"/>
+            <a:r>
+              <a:rPr kumimoji="1" lang="ja-JP" altLang="en-US" dirty="0"/>
+              <a:t>このドキュメント、しばらく </a:t>
+            </a:r>
+            <a:endParaRPr kumimoji="1" lang="en-US" altLang="ja-JP" dirty="0"/>
+          </a:p>
+          <a:p>
+            <a:pPr algn="ctr"/>
+            <a:r>
+              <a:rPr kumimoji="1" lang="ja-JP" altLang="en-US" dirty="0"/>
+              <a:t>あずかって</a:t>
+            </a:r>
+            <a:r>
+              <a:rPr kumimoji="1" lang="en-US" altLang="ja-JP" dirty="0"/>
+              <a:t>!</a:t>
+            </a:r>
+            <a:endParaRPr kumimoji="1" lang="ja-JP" altLang="en-US" dirty="0"/>
+          </a:p>
+        </p:txBody>
+      </p:sp>
+      <p:sp>
+        <p:nvSpPr>
+          <p:cNvPr id="9" name="吹き出し: 円形 8">
+            <a:extLst>
+              <a:ext uri="{FF2B5EF4-FFF2-40B4-BE49-F238E27FC236}">
+                <a16:creationId xmlns:a16="http://schemas.microsoft.com/office/drawing/2014/main" id="{EBABEC24-B9D7-A156-3E48-3CA509B18E76}"/>
+              </a:ext>
+            </a:extLst>
+          </p:cNvPr>
+          <p:cNvSpPr/>
+          <p:nvPr/>
+        </p:nvSpPr>
+        <p:spPr>
+          <a:xfrm>
+            <a:off x="7622721" y="4520293"/>
+            <a:ext cx="3864429" cy="1575707"/>
+          </a:xfrm>
+          <a:prstGeom prst="wedgeEllipseCallout">
+            <a:avLst>
+              <a:gd name="adj1" fmla="val 54906"/>
+              <a:gd name="adj2" fmla="val 79599"/>
+            </a:avLst>
+          </a:prstGeom>
+        </p:spPr>
+        <p:style>
+          <a:lnRef idx="2">
+            <a:schemeClr val="accent6"/>
+          </a:lnRef>
+          <a:fillRef idx="1">
+            <a:schemeClr val="lt1"/>
+          </a:fillRef>
+          <a:effectRef idx="0">
+            <a:schemeClr val="accent6"/>
+          </a:effectRef>
+          <a:fontRef idx="minor">
+            <a:schemeClr val="dk1"/>
+          </a:fontRef>
+        </p:style>
+        <p:txBody>
+          <a:bodyPr rtlCol="0" anchor="ctr"/>
+          <a:lstStyle/>
+          <a:p>
+            <a:pPr algn="ctr"/>
+            <a:r>
+              <a:rPr kumimoji="1" lang="ja-JP" altLang="en-US" dirty="0"/>
+              <a:t>この</a:t>
+            </a:r>
+            <a:r>
+              <a:rPr lang="ja-JP" altLang="en-US" dirty="0"/>
+              <a:t>ぶひん</a:t>
+            </a:r>
+            <a:r>
+              <a:rPr kumimoji="1" lang="ja-JP" altLang="en-US" dirty="0"/>
+              <a:t>、こうじょうに もっていって</a:t>
+            </a:r>
+            <a:r>
+              <a:rPr kumimoji="1" lang="en-US" altLang="ja-JP" dirty="0"/>
+              <a:t>!</a:t>
+            </a:r>
+            <a:endParaRPr kumimoji="1" lang="ja-JP" altLang="en-US" dirty="0"/>
+          </a:p>
+        </p:txBody>
+      </p:sp>
+      <p:sp>
+        <p:nvSpPr>
+          <p:cNvPr id="10" name="思考の吹き出し: 雲形 9">
+            <a:extLst>
+              <a:ext uri="{FF2B5EF4-FFF2-40B4-BE49-F238E27FC236}">
+                <a16:creationId xmlns:a16="http://schemas.microsoft.com/office/drawing/2014/main" id="{EE8E500C-9AF2-9591-0F56-AED224727E98}"/>
+              </a:ext>
+            </a:extLst>
+          </p:cNvPr>
+          <p:cNvSpPr/>
+          <p:nvPr/>
+        </p:nvSpPr>
+        <p:spPr>
+          <a:xfrm>
+            <a:off x="7622721" y="644980"/>
+            <a:ext cx="4182836" cy="2939142"/>
+          </a:xfrm>
+          <a:prstGeom prst="cloudCallout">
+            <a:avLst>
+              <a:gd name="adj1" fmla="val -71104"/>
+              <a:gd name="adj2" fmla="val -2583"/>
+            </a:avLst>
+          </a:prstGeom>
+        </p:spPr>
+        <p:style>
+          <a:lnRef idx="2">
+            <a:schemeClr val="accent1">
+              <a:shade val="15000"/>
+            </a:schemeClr>
+          </a:lnRef>
+          <a:fillRef idx="1">
+            <a:schemeClr val="accent1"/>
+          </a:fillRef>
+          <a:effectRef idx="0">
+            <a:schemeClr val="accent1"/>
+          </a:effectRef>
+          <a:fontRef idx="minor">
+            <a:schemeClr val="lt1"/>
+          </a:fontRef>
+        </p:style>
+        <p:txBody>
+          <a:bodyPr rtlCol="0" anchor="ctr"/>
+          <a:lstStyle/>
+          <a:p>
+            <a:pPr algn="ctr"/>
+            <a:r>
+              <a:rPr lang="ja-JP" altLang="en-US" dirty="0"/>
+              <a:t>わたし</a:t>
+            </a:r>
+            <a:r>
+              <a:rPr kumimoji="1" lang="ja-JP" altLang="en-US" dirty="0"/>
+              <a:t>は オブジェクト</a:t>
+            </a:r>
+            <a:r>
+              <a:rPr lang="ja-JP" altLang="en-US" dirty="0"/>
+              <a:t>です。</a:t>
+            </a:r>
+            <a:endParaRPr lang="en-US" altLang="ja-JP" dirty="0"/>
+          </a:p>
+          <a:p>
+            <a:pPr algn="ctr"/>
+            <a:r>
+              <a:rPr kumimoji="1" lang="ja-JP" altLang="en-US" dirty="0"/>
+              <a:t>しごとの </a:t>
+            </a:r>
+            <a:r>
+              <a:rPr lang="ja-JP" altLang="en-US" dirty="0"/>
+              <a:t>いらい</a:t>
+            </a:r>
+            <a:r>
+              <a:rPr kumimoji="1" lang="ja-JP" altLang="en-US" dirty="0"/>
+              <a:t>、</a:t>
+            </a:r>
+            <a:endParaRPr kumimoji="1" lang="en-US" altLang="ja-JP" dirty="0"/>
+          </a:p>
+          <a:p>
+            <a:pPr algn="ctr"/>
+            <a:r>
+              <a:rPr lang="ja-JP" altLang="en-US" dirty="0"/>
+              <a:t>う</a:t>
+            </a:r>
+            <a:r>
+              <a:rPr kumimoji="1" lang="ja-JP" altLang="en-US" dirty="0"/>
+              <a:t>けますよ！</a:t>
+            </a:r>
+          </a:p>
+        </p:txBody>
+      </p:sp>
+    </p:spTree>
+    <p:extLst>
+      <p:ext uri="{BB962C8B-B14F-4D97-AF65-F5344CB8AC3E}">
+        <p14:creationId xmlns:p14="http://schemas.microsoft.com/office/powerpoint/2010/main" val="473636867"/>
+      </p:ext>
+    </p:extLst>
+  </p:cSld>
+  <p:clrMapOvr>
+    <a:masterClrMapping/>
+  </p:clrMapOvr>
+</p:sld>
+</file>
+
+<file path=ppt/slides/slide4.xml><?xml version="1.0" encoding="utf-8"?>
+<p:sld xmlns:a="http://schemas.openxmlformats.org/drawingml/2006/main" xmlns:r="http://schemas.openxmlformats.org/officeDocument/2006/relationships" xmlns:p="http://schemas.openxmlformats.org/presentationml/2006/main">
+  <p:cSld>
+    <p:spTree>
+      <p:nvGrpSpPr>
+        <p:cNvPr id="1" name="">
+          <a:extLst>
+            <a:ext uri="{FF2B5EF4-FFF2-40B4-BE49-F238E27FC236}">
+              <a16:creationId xmlns:a16="http://schemas.microsoft.com/office/drawing/2014/main" id="{8F08CA86-0690-FA5C-0228-EFAD27F4B96C}"/>
+            </a:ext>
+          </a:extLst>
+        </p:cNvPr>
+        <p:cNvGrpSpPr/>
+        <p:nvPr/>
+      </p:nvGrpSpPr>
+      <p:grpSpPr>
+        <a:xfrm>
+          <a:off x="0" y="0"/>
+          <a:ext cx="0" cy="0"/>
+          <a:chOff x="0" y="0"/>
+          <a:chExt cx="0" cy="0"/>
+        </a:xfrm>
+      </p:grpSpPr>
+      <p:pic>
+        <p:nvPicPr>
+          <p:cNvPr id="5" name="図 4" descr="ゲームのキャラクター&#10;&#10;AI によって生成されたコンテンツは間違っている可能性があります。">
+            <a:extLst>
+              <a:ext uri="{FF2B5EF4-FFF2-40B4-BE49-F238E27FC236}">
+                <a16:creationId xmlns:a16="http://schemas.microsoft.com/office/drawing/2014/main" id="{FC12999B-C7B1-E16E-F0E9-B3C576092201}"/>
+              </a:ext>
+            </a:extLst>
+          </p:cNvPr>
+          <p:cNvPicPr>
+            <a:picLocks noChangeAspect="1"/>
+          </p:cNvPicPr>
+          <p:nvPr/>
+        </p:nvPicPr>
+        <p:blipFill>
+          <a:blip r:embed="rId3">
+            <a:extLst>
+              <a:ext uri="{28A0092B-C50C-407E-A947-70E740481C1C}">
+                <a14:useLocalDpi xmlns:a14="http://schemas.microsoft.com/office/drawing/2010/main" val="0"/>
+              </a:ext>
+            </a:extLst>
+          </a:blip>
+          <a:stretch>
+            <a:fillRect/>
+          </a:stretch>
+        </p:blipFill>
+        <p:spPr>
+          <a:xfrm>
+            <a:off x="942296" y="528637"/>
+            <a:ext cx="2019015" cy="1692049"/>
+          </a:xfrm>
+          <a:prstGeom prst="rect">
+            <a:avLst/>
+          </a:prstGeom>
+        </p:spPr>
+      </p:pic>
+      <p:pic>
+        <p:nvPicPr>
+          <p:cNvPr id="7" name="図 6" descr="光 が含まれている画像&#10;&#10;AI によって生成されたコンテンツは間違っている可能性があります。">
+            <a:extLst>
+              <a:ext uri="{FF2B5EF4-FFF2-40B4-BE49-F238E27FC236}">
+                <a16:creationId xmlns:a16="http://schemas.microsoft.com/office/drawing/2014/main" id="{A40A7729-4498-46B5-6B3A-A3826CBAC0B4}"/>
+              </a:ext>
+            </a:extLst>
+          </p:cNvPr>
+          <p:cNvPicPr>
+            <a:picLocks noChangeAspect="1"/>
+          </p:cNvPicPr>
+          <p:nvPr/>
+        </p:nvPicPr>
+        <p:blipFill>
+          <a:blip r:embed="rId4">
+            <a:extLst>
+              <a:ext uri="{28A0092B-C50C-407E-A947-70E740481C1C}">
+                <a14:useLocalDpi xmlns:a14="http://schemas.microsoft.com/office/drawing/2010/main" val="0"/>
+              </a:ext>
+            </a:extLst>
+          </a:blip>
+          <a:stretch>
+            <a:fillRect/>
+          </a:stretch>
+        </p:blipFill>
+        <p:spPr>
+          <a:xfrm>
+            <a:off x="1130712" y="2343149"/>
+            <a:ext cx="1642182" cy="1861457"/>
+          </a:xfrm>
+          <a:prstGeom prst="rect">
+            <a:avLst/>
+          </a:prstGeom>
+        </p:spPr>
+      </p:pic>
+      <p:pic>
+        <p:nvPicPr>
+          <p:cNvPr id="9" name="図 8" descr="光 が含まれている画像&#10;&#10;AI によって生成されたコンテンツは間違っている可能性があります。">
+            <a:extLst>
+              <a:ext uri="{FF2B5EF4-FFF2-40B4-BE49-F238E27FC236}">
+                <a16:creationId xmlns:a16="http://schemas.microsoft.com/office/drawing/2014/main" id="{CE4A5D56-7039-EDB2-1E43-62380C7C2D31}"/>
+              </a:ext>
+            </a:extLst>
+          </p:cNvPr>
+          <p:cNvPicPr>
+            <a:picLocks noChangeAspect="1"/>
+          </p:cNvPicPr>
+          <p:nvPr/>
+        </p:nvPicPr>
+        <p:blipFill>
+          <a:blip r:embed="rId5">
+            <a:extLst>
+              <a:ext uri="{28A0092B-C50C-407E-A947-70E740481C1C}">
+                <a14:useLocalDpi xmlns:a14="http://schemas.microsoft.com/office/drawing/2010/main" val="0"/>
+              </a:ext>
+            </a:extLst>
+          </a:blip>
+          <a:stretch>
+            <a:fillRect/>
+          </a:stretch>
+        </p:blipFill>
+        <p:spPr>
+          <a:xfrm>
+            <a:off x="1070320" y="4204606"/>
+            <a:ext cx="1762965" cy="2179864"/>
+          </a:xfrm>
+          <a:prstGeom prst="rect">
+            <a:avLst/>
+          </a:prstGeom>
+        </p:spPr>
+      </p:pic>
+      <p:sp>
+        <p:nvSpPr>
+          <p:cNvPr id="10" name="吹き出し: 円形 9">
+            <a:extLst>
+              <a:ext uri="{FF2B5EF4-FFF2-40B4-BE49-F238E27FC236}">
+                <a16:creationId xmlns:a16="http://schemas.microsoft.com/office/drawing/2014/main" id="{107EB8A6-CC62-9FE2-4E83-93CA0369ED54}"/>
+              </a:ext>
+            </a:extLst>
+          </p:cNvPr>
+          <p:cNvSpPr/>
+          <p:nvPr/>
+        </p:nvSpPr>
+        <p:spPr>
+          <a:xfrm>
+            <a:off x="783774" y="528637"/>
+            <a:ext cx="979714" cy="589870"/>
+          </a:xfrm>
+          <a:prstGeom prst="wedgeEllipseCallout">
+            <a:avLst>
+              <a:gd name="adj1" fmla="val -9166"/>
+              <a:gd name="adj2" fmla="val 58348"/>
+            </a:avLst>
+          </a:prstGeom>
+        </p:spPr>
+        <p:style>
+          <a:lnRef idx="2">
+            <a:schemeClr val="dk1"/>
+          </a:lnRef>
+          <a:fillRef idx="1">
+            <a:schemeClr val="lt1"/>
+          </a:fillRef>
+          <a:effectRef idx="0">
+            <a:schemeClr val="dk1"/>
+          </a:effectRef>
+          <a:fontRef idx="minor">
+            <a:schemeClr val="dk1"/>
+          </a:fontRef>
+        </p:style>
+        <p:txBody>
+          <a:bodyPr rtlCol="0" anchor="ctr"/>
+          <a:lstStyle/>
+          <a:p>
+            <a:pPr algn="ctr"/>
+            <a:r>
+              <a:rPr kumimoji="1" lang="en-US" altLang="ja-JP" dirty="0">
+                <a:latin typeface="ADLaM Display" panose="020F0502020204030204" pitchFamily="2" charset="0"/>
+                <a:ea typeface="ADLaM Display" panose="020F0502020204030204" pitchFamily="2" charset="0"/>
+                <a:cs typeface="ADLaM Display" panose="020F0502020204030204" pitchFamily="2" charset="0"/>
+              </a:rPr>
+              <a:t>ON</a:t>
+            </a:r>
+            <a:endParaRPr kumimoji="1" lang="ja-JP" altLang="en-US" dirty="0">
+              <a:latin typeface="ADLaM Display" panose="020F0502020204030204" pitchFamily="2" charset="0"/>
+              <a:cs typeface="ADLaM Display" panose="020F0502020204030204" pitchFamily="2" charset="0"/>
+            </a:endParaRPr>
+          </a:p>
+        </p:txBody>
+      </p:sp>
+      <p:sp>
+        <p:nvSpPr>
+          <p:cNvPr id="11" name="テキスト ボックス 10">
+            <a:extLst>
+              <a:ext uri="{FF2B5EF4-FFF2-40B4-BE49-F238E27FC236}">
+                <a16:creationId xmlns:a16="http://schemas.microsoft.com/office/drawing/2014/main" id="{58C5102E-DFF7-1D48-182A-8B255B53A437}"/>
+              </a:ext>
+            </a:extLst>
+          </p:cNvPr>
+          <p:cNvSpPr txBox="1"/>
+          <p:nvPr/>
+        </p:nvSpPr>
+        <p:spPr>
+          <a:xfrm>
+            <a:off x="3282707" y="1118507"/>
+            <a:ext cx="3262432" cy="830997"/>
+          </a:xfrm>
+          <a:prstGeom prst="rect">
+            <a:avLst/>
+          </a:prstGeom>
+          <a:noFill/>
+        </p:spPr>
+        <p:txBody>
+          <a:bodyPr wrap="square" rtlCol="0">
+            <a:spAutoFit/>
+          </a:bodyPr>
+          <a:lstStyle/>
+          <a:p>
+            <a:r>
+              <a:rPr lang="ja-JP" altLang="en-US" sz="2400" dirty="0"/>
+              <a:t>だれか スイッチを おした</a:t>
+            </a:r>
+            <a:endParaRPr kumimoji="1" lang="ja-JP" altLang="en-US" sz="2400" dirty="0"/>
+          </a:p>
+        </p:txBody>
+      </p:sp>
+      <p:sp>
+        <p:nvSpPr>
+          <p:cNvPr id="12" name="テキスト ボックス 11">
+            <a:extLst>
+              <a:ext uri="{FF2B5EF4-FFF2-40B4-BE49-F238E27FC236}">
+                <a16:creationId xmlns:a16="http://schemas.microsoft.com/office/drawing/2014/main" id="{F5269400-24F2-FF54-5FF9-F3898F9A9427}"/>
+              </a:ext>
+            </a:extLst>
+          </p:cNvPr>
+          <p:cNvSpPr txBox="1"/>
+          <p:nvPr/>
+        </p:nvSpPr>
+        <p:spPr>
+          <a:xfrm>
+            <a:off x="3282707" y="2858378"/>
+            <a:ext cx="3130985" cy="830997"/>
+          </a:xfrm>
+          <a:prstGeom prst="rect">
+            <a:avLst/>
+          </a:prstGeom>
+          <a:noFill/>
+        </p:spPr>
+        <p:txBody>
+          <a:bodyPr wrap="none" rtlCol="0">
+            <a:spAutoFit/>
+          </a:bodyPr>
+          <a:lstStyle/>
+          <a:p>
+            <a:r>
+              <a:rPr lang="ja-JP" altLang="en-US" sz="2400" dirty="0"/>
+              <a:t>かべの でんきゅうに </a:t>
+            </a:r>
+            <a:endParaRPr lang="en-US" altLang="ja-JP" sz="2400" dirty="0"/>
+          </a:p>
+          <a:p>
+            <a:r>
+              <a:rPr kumimoji="1" lang="ja-JP" altLang="en-US" sz="2400" dirty="0"/>
+              <a:t>でんきを ながす</a:t>
+            </a:r>
+          </a:p>
+        </p:txBody>
+      </p:sp>
+      <p:sp>
+        <p:nvSpPr>
+          <p:cNvPr id="13" name="テキスト ボックス 12">
+            <a:extLst>
+              <a:ext uri="{FF2B5EF4-FFF2-40B4-BE49-F238E27FC236}">
+                <a16:creationId xmlns:a16="http://schemas.microsoft.com/office/drawing/2014/main" id="{DC515835-AC3C-619C-C4E9-792AA76E6AE9}"/>
+              </a:ext>
+            </a:extLst>
+          </p:cNvPr>
+          <p:cNvSpPr txBox="1"/>
+          <p:nvPr/>
+        </p:nvSpPr>
+        <p:spPr>
+          <a:xfrm>
+            <a:off x="3590484" y="4980212"/>
+            <a:ext cx="2735044" cy="461665"/>
+          </a:xfrm>
+          <a:prstGeom prst="rect">
+            <a:avLst/>
+          </a:prstGeom>
+          <a:noFill/>
+        </p:spPr>
+        <p:txBody>
+          <a:bodyPr wrap="none" rtlCol="0">
+            <a:spAutoFit/>
+          </a:bodyPr>
+          <a:lstStyle/>
+          <a:p>
+            <a:r>
+              <a:rPr lang="ja-JP" altLang="en-US" sz="2400" dirty="0"/>
+              <a:t>あかりが ついた！</a:t>
+            </a:r>
+            <a:endParaRPr kumimoji="1" lang="ja-JP" altLang="en-US" sz="2400" dirty="0"/>
+          </a:p>
+        </p:txBody>
+      </p:sp>
+      <p:sp>
+        <p:nvSpPr>
+          <p:cNvPr id="14" name="テキスト ボックス 13">
+            <a:extLst>
+              <a:ext uri="{FF2B5EF4-FFF2-40B4-BE49-F238E27FC236}">
+                <a16:creationId xmlns:a16="http://schemas.microsoft.com/office/drawing/2014/main" id="{59E4B49D-F8C7-A240-877A-6186304D9969}"/>
+              </a:ext>
+            </a:extLst>
+          </p:cNvPr>
+          <p:cNvSpPr txBox="1"/>
+          <p:nvPr/>
+        </p:nvSpPr>
+        <p:spPr>
+          <a:xfrm>
+            <a:off x="7756738" y="1118506"/>
+            <a:ext cx="2735044" cy="461665"/>
+          </a:xfrm>
+          <a:prstGeom prst="rect">
+            <a:avLst/>
+          </a:prstGeom>
+          <a:noFill/>
+        </p:spPr>
+        <p:txBody>
+          <a:bodyPr wrap="none" rtlCol="0">
+            <a:spAutoFit/>
+          </a:bodyPr>
+          <a:lstStyle/>
+          <a:p>
+            <a:r>
+              <a:rPr lang="ja-JP" altLang="en-US" sz="2400" dirty="0"/>
+              <a:t>イベントが おきた</a:t>
+            </a:r>
+            <a:endParaRPr kumimoji="1" lang="ja-JP" altLang="en-US" sz="2400" dirty="0"/>
+          </a:p>
+        </p:txBody>
+      </p:sp>
+      <p:sp>
+        <p:nvSpPr>
+          <p:cNvPr id="15" name="テキスト ボックス 14">
+            <a:extLst>
+              <a:ext uri="{FF2B5EF4-FFF2-40B4-BE49-F238E27FC236}">
+                <a16:creationId xmlns:a16="http://schemas.microsoft.com/office/drawing/2014/main" id="{6026282E-2BB9-61AC-F561-2FBB1462C1FA}"/>
+              </a:ext>
+            </a:extLst>
+          </p:cNvPr>
+          <p:cNvSpPr txBox="1"/>
+          <p:nvPr/>
+        </p:nvSpPr>
+        <p:spPr>
+          <a:xfrm>
+            <a:off x="7250991" y="2862386"/>
+            <a:ext cx="3658374" cy="830997"/>
+          </a:xfrm>
+          <a:prstGeom prst="rect">
+            <a:avLst/>
+          </a:prstGeom>
+          <a:noFill/>
+        </p:spPr>
+        <p:txBody>
+          <a:bodyPr wrap="none" rtlCol="0">
+            <a:spAutoFit/>
+          </a:bodyPr>
+          <a:lstStyle/>
+          <a:p>
+            <a:pPr algn="ctr"/>
+            <a:r>
+              <a:rPr kumimoji="1" lang="ja-JP" altLang="en-US" sz="2400" dirty="0"/>
+              <a:t>オブジェクトを </a:t>
+            </a:r>
+            <a:r>
+              <a:rPr lang="ja-JP" altLang="en-US" sz="2400" dirty="0"/>
+              <a:t>えら</a:t>
+            </a:r>
+            <a:r>
+              <a:rPr kumimoji="1" lang="ja-JP" altLang="en-US" sz="2400" dirty="0"/>
+              <a:t>んで</a:t>
+            </a:r>
+            <a:endParaRPr kumimoji="1" lang="en-US" altLang="ja-JP" sz="2400" dirty="0"/>
+          </a:p>
+          <a:p>
+            <a:pPr algn="ctr"/>
+            <a:r>
+              <a:rPr lang="ja-JP" altLang="en-US" sz="2400" dirty="0"/>
+              <a:t>めいれいする</a:t>
+            </a:r>
+            <a:endParaRPr kumimoji="1" lang="ja-JP" altLang="en-US" sz="2400" dirty="0"/>
+          </a:p>
+        </p:txBody>
+      </p:sp>
+      <p:sp>
+        <p:nvSpPr>
+          <p:cNvPr id="16" name="テキスト ボックス 15">
+            <a:extLst>
+              <a:ext uri="{FF2B5EF4-FFF2-40B4-BE49-F238E27FC236}">
+                <a16:creationId xmlns:a16="http://schemas.microsoft.com/office/drawing/2014/main" id="{35BE5446-70B1-8E53-0444-176CA8C66623}"/>
+              </a:ext>
+            </a:extLst>
+          </p:cNvPr>
+          <p:cNvSpPr txBox="1"/>
+          <p:nvPr/>
+        </p:nvSpPr>
+        <p:spPr>
+          <a:xfrm>
+            <a:off x="7756738" y="4980211"/>
+            <a:ext cx="3042821" cy="461665"/>
+          </a:xfrm>
+          <a:prstGeom prst="rect">
+            <a:avLst/>
+          </a:prstGeom>
+          <a:noFill/>
+        </p:spPr>
+        <p:txBody>
+          <a:bodyPr wrap="none" rtlCol="0">
+            <a:spAutoFit/>
+          </a:bodyPr>
+          <a:lstStyle/>
+          <a:p>
+            <a:r>
+              <a:rPr kumimoji="1" lang="ja-JP" altLang="en-US" sz="2400" dirty="0"/>
+              <a:t>プログラムが </a:t>
+            </a:r>
+            <a:r>
+              <a:rPr lang="ja-JP" altLang="en-US" sz="2400" dirty="0"/>
+              <a:t>うごく</a:t>
+            </a:r>
+            <a:endParaRPr kumimoji="1" lang="ja-JP" altLang="en-US" sz="2400" dirty="0"/>
+          </a:p>
+        </p:txBody>
+      </p:sp>
+      <p:cxnSp>
+        <p:nvCxnSpPr>
+          <p:cNvPr id="18" name="直線コネクタ 17">
+            <a:extLst>
+              <a:ext uri="{FF2B5EF4-FFF2-40B4-BE49-F238E27FC236}">
+                <a16:creationId xmlns:a16="http://schemas.microsoft.com/office/drawing/2014/main" id="{C566CDFD-892D-0687-1B47-334653BC37F9}"/>
+              </a:ext>
+            </a:extLst>
+          </p:cNvPr>
+          <p:cNvCxnSpPr/>
+          <p:nvPr/>
+        </p:nvCxnSpPr>
+        <p:spPr>
+          <a:xfrm>
+            <a:off x="563336" y="2343149"/>
+            <a:ext cx="11103428" cy="0"/>
+          </a:xfrm>
+          <a:prstGeom prst="line">
+            <a:avLst/>
+          </a:prstGeom>
+        </p:spPr>
+        <p:style>
+          <a:lnRef idx="2">
+            <a:schemeClr val="accent1"/>
+          </a:lnRef>
+          <a:fillRef idx="0">
+            <a:schemeClr val="accent1"/>
+          </a:fillRef>
+          <a:effectRef idx="1">
+            <a:schemeClr val="accent1"/>
+          </a:effectRef>
+          <a:fontRef idx="minor">
+            <a:schemeClr val="tx1"/>
+          </a:fontRef>
+        </p:style>
+      </p:cxnSp>
+      <p:cxnSp>
+        <p:nvCxnSpPr>
+          <p:cNvPr id="19" name="直線コネクタ 18">
+            <a:extLst>
+              <a:ext uri="{FF2B5EF4-FFF2-40B4-BE49-F238E27FC236}">
+                <a16:creationId xmlns:a16="http://schemas.microsoft.com/office/drawing/2014/main" id="{6E28AEEC-35D0-529B-D069-C6094C1D8EF6}"/>
+              </a:ext>
+            </a:extLst>
+          </p:cNvPr>
+          <p:cNvCxnSpPr/>
+          <p:nvPr/>
+        </p:nvCxnSpPr>
+        <p:spPr>
+          <a:xfrm>
+            <a:off x="618042" y="4204606"/>
+            <a:ext cx="11103428" cy="0"/>
+          </a:xfrm>
+          <a:prstGeom prst="line">
+            <a:avLst/>
+          </a:prstGeom>
+        </p:spPr>
+        <p:style>
+          <a:lnRef idx="2">
+            <a:schemeClr val="accent1"/>
+          </a:lnRef>
+          <a:fillRef idx="0">
+            <a:schemeClr val="accent1"/>
+          </a:fillRef>
+          <a:effectRef idx="1">
+            <a:schemeClr val="accent1"/>
+          </a:effectRef>
+          <a:fontRef idx="minor">
+            <a:schemeClr val="tx1"/>
+          </a:fontRef>
+        </p:style>
+      </p:cxnSp>
+    </p:spTree>
+    <p:extLst>
+      <p:ext uri="{BB962C8B-B14F-4D97-AF65-F5344CB8AC3E}">
+        <p14:creationId xmlns:p14="http://schemas.microsoft.com/office/powerpoint/2010/main" val="360896339"/>
+      </p:ext>
+    </p:extLst>
+  </p:cSld>
+  <p:clrMapOvr>
+    <a:masterClrMapping/>
+  </p:clrMapOvr>
+</p:sld>
+</file>
+
+<file path=ppt/slides/slide5.xml><?xml version="1.0" encoding="utf-8"?>
+<p:sld xmlns:a="http://schemas.openxmlformats.org/drawingml/2006/main" xmlns:r="http://schemas.openxmlformats.org/officeDocument/2006/relationships" xmlns:p="http://schemas.openxmlformats.org/presentationml/2006/main">
+  <p:cSld>
+    <p:spTree>
+      <p:nvGrpSpPr>
+        <p:cNvPr id="1" name=""/>
+        <p:cNvGrpSpPr/>
+        <p:nvPr/>
+      </p:nvGrpSpPr>
+      <p:grpSpPr>
+        <a:xfrm>
+          <a:off x="0" y="0"/>
+          <a:ext cx="0" cy="0"/>
+          <a:chOff x="0" y="0"/>
+          <a:chExt cx="0" cy="0"/>
+        </a:xfrm>
+      </p:grpSpPr>
       <p:pic>
         <p:nvPicPr>
           <p:cNvPr id="5" name="図 4">
@@ -4670,7 +7702,7 @@
 </p:sld>
 </file>
 
-<file path=ppt/slides/slide3.xml><?xml version="1.0" encoding="utf-8"?>
+<file path=ppt/slides/slide6.xml><?xml version="1.0" encoding="utf-8"?>
 <p:sld xmlns:a="http://schemas.openxmlformats.org/drawingml/2006/main" xmlns:r="http://schemas.openxmlformats.org/officeDocument/2006/relationships" xmlns:p="http://schemas.openxmlformats.org/presentationml/2006/main">
   <p:cSld>
     <p:spTree>
@@ -5118,7 +8150,7 @@
 </p:sld>
 </file>
 
-<file path=ppt/slides/slide4.xml><?xml version="1.0" encoding="utf-8"?>
+<file path=ppt/slides/slide7.xml><?xml version="1.0" encoding="utf-8"?>
 <p:sld xmlns:a="http://schemas.openxmlformats.org/drawingml/2006/main" xmlns:r="http://schemas.openxmlformats.org/officeDocument/2006/relationships" xmlns:p="http://schemas.openxmlformats.org/presentationml/2006/main">
   <p:cSld>
     <p:spTree>
@@ -5847,7 +8879,7 @@
 </p:sld>
 </file>
 
-<file path=ppt/slides/slide5.xml><?xml version="1.0" encoding="utf-8"?>
+<file path=ppt/slides/slide8.xml><?xml version="1.0" encoding="utf-8"?>
 <p:sld xmlns:a="http://schemas.openxmlformats.org/drawingml/2006/main" xmlns:r="http://schemas.openxmlformats.org/officeDocument/2006/relationships" xmlns:p="http://schemas.openxmlformats.org/presentationml/2006/main">
   <p:cSld>
     <p:spTree>
@@ -6066,7 +9098,7 @@
 </p:sld>
 </file>
 
-<file path=ppt/slides/slide6.xml><?xml version="1.0" encoding="utf-8"?>
+<file path=ppt/slides/slide9.xml><?xml version="1.0" encoding="utf-8"?>
 <p:sld xmlns:a="http://schemas.openxmlformats.org/drawingml/2006/main" xmlns:r="http://schemas.openxmlformats.org/officeDocument/2006/relationships" xmlns:p="http://schemas.openxmlformats.org/presentationml/2006/main">
   <p:cSld>
     <p:spTree>
@@ -6458,1360 +9490,6 @@
     <p:extLst>
       <p:ext uri="{BB962C8B-B14F-4D97-AF65-F5344CB8AC3E}">
         <p14:creationId xmlns:p14="http://schemas.microsoft.com/office/powerpoint/2010/main" val="513055906"/>
-      </p:ext>
-    </p:extLst>
-  </p:cSld>
-  <p:clrMapOvr>
-    <a:masterClrMapping/>
-  </p:clrMapOvr>
-</p:sld>
-</file>
-
-<file path=ppt/slides/slide7.xml><?xml version="1.0" encoding="utf-8"?>
-<p:sld xmlns:a="http://schemas.openxmlformats.org/drawingml/2006/main" xmlns:r="http://schemas.openxmlformats.org/officeDocument/2006/relationships" xmlns:p="http://schemas.openxmlformats.org/presentationml/2006/main">
-  <p:cSld>
-    <p:spTree>
-      <p:nvGrpSpPr>
-        <p:cNvPr id="1" name=""/>
-        <p:cNvGrpSpPr/>
-        <p:nvPr/>
-      </p:nvGrpSpPr>
-      <p:grpSpPr>
-        <a:xfrm>
-          <a:off x="0" y="0"/>
-          <a:ext cx="0" cy="0"/>
-          <a:chOff x="0" y="0"/>
-          <a:chExt cx="0" cy="0"/>
-        </a:xfrm>
-      </p:grpSpPr>
-      <p:sp>
-        <p:nvSpPr>
-          <p:cNvPr id="3" name="テキスト ボックス 2">
-            <a:extLst>
-              <a:ext uri="{FF2B5EF4-FFF2-40B4-BE49-F238E27FC236}">
-                <a16:creationId xmlns:a16="http://schemas.microsoft.com/office/drawing/2014/main" id="{0E458772-A55E-C3DF-F650-004E6885C1AF}"/>
-              </a:ext>
-            </a:extLst>
-          </p:cNvPr>
-          <p:cNvSpPr txBox="1"/>
-          <p:nvPr/>
-        </p:nvSpPr>
-        <p:spPr>
-          <a:xfrm>
-            <a:off x="1671771" y="1111762"/>
-            <a:ext cx="9152164" cy="786497"/>
-          </a:xfrm>
-          <a:prstGeom prst="rect">
-            <a:avLst/>
-          </a:prstGeom>
-          <a:solidFill>
-            <a:schemeClr val="bg2"/>
-          </a:solidFill>
-        </p:spPr>
-        <p:txBody>
-          <a:bodyPr wrap="square">
-            <a:spAutoFit/>
-          </a:bodyPr>
-          <a:lstStyle/>
-          <a:p>
-            <a:pPr>
-              <a:lnSpc>
-                <a:spcPts val="1800"/>
-              </a:lnSpc>
-            </a:pPr>
-            <a:r>
-              <a:rPr lang="en-US" altLang="ja-JP" b="0" dirty="0">
-                <a:solidFill>
-                  <a:srgbClr val="93A1A1"/>
-                </a:solidFill>
-                <a:effectLst/>
-                <a:latin typeface="Consolas" panose="020B0609020204030204" pitchFamily="49" charset="0"/>
-              </a:rPr>
-              <a:t>&lt;</a:t>
-            </a:r>
-            <a:r>
-              <a:rPr lang="en-US" altLang="ja-JP" b="0" dirty="0">
-                <a:solidFill>
-                  <a:srgbClr val="268BD2"/>
-                </a:solidFill>
-                <a:effectLst/>
-                <a:latin typeface="Consolas" panose="020B0609020204030204" pitchFamily="49" charset="0"/>
-              </a:rPr>
-              <a:t>button</a:t>
-            </a:r>
-            <a:r>
-              <a:rPr lang="en-US" altLang="ja-JP" b="0" dirty="0">
-                <a:solidFill>
-                  <a:srgbClr val="657B83"/>
-                </a:solidFill>
-                <a:effectLst/>
-                <a:latin typeface="Consolas" panose="020B0609020204030204" pitchFamily="49" charset="0"/>
-              </a:rPr>
-              <a:t> </a:t>
-            </a:r>
-            <a:r>
-              <a:rPr lang="en-US" altLang="ja-JP" b="0" dirty="0">
-                <a:solidFill>
-                  <a:srgbClr val="93A1A1"/>
-                </a:solidFill>
-                <a:effectLst/>
-                <a:latin typeface="Consolas" panose="020B0609020204030204" pitchFamily="49" charset="0"/>
-              </a:rPr>
-              <a:t>type</a:t>
-            </a:r>
-            <a:r>
-              <a:rPr lang="en-US" altLang="ja-JP" b="0" dirty="0">
-                <a:solidFill>
-                  <a:srgbClr val="657B83"/>
-                </a:solidFill>
-                <a:effectLst/>
-                <a:latin typeface="Consolas" panose="020B0609020204030204" pitchFamily="49" charset="0"/>
-              </a:rPr>
-              <a:t>=</a:t>
-            </a:r>
-            <a:r>
-              <a:rPr lang="en-US" altLang="ja-JP" b="0" dirty="0">
-                <a:solidFill>
-                  <a:srgbClr val="2AA198"/>
-                </a:solidFill>
-                <a:effectLst/>
-                <a:latin typeface="Consolas" panose="020B0609020204030204" pitchFamily="49" charset="0"/>
-              </a:rPr>
-              <a:t>"button"</a:t>
-            </a:r>
-            <a:r>
-              <a:rPr lang="en-US" altLang="ja-JP" b="0" dirty="0">
-                <a:solidFill>
-                  <a:srgbClr val="657B83"/>
-                </a:solidFill>
-                <a:effectLst/>
-                <a:latin typeface="Consolas" panose="020B0609020204030204" pitchFamily="49" charset="0"/>
-              </a:rPr>
-              <a:t> </a:t>
-            </a:r>
-            <a:r>
-              <a:rPr lang="en-US" altLang="ja-JP" b="0" dirty="0">
-                <a:solidFill>
-                  <a:srgbClr val="93A1A1"/>
-                </a:solidFill>
-                <a:effectLst/>
-                <a:latin typeface="Consolas" panose="020B0609020204030204" pitchFamily="49" charset="0"/>
-              </a:rPr>
-              <a:t>onclick</a:t>
-            </a:r>
-            <a:r>
-              <a:rPr lang="en-US" altLang="ja-JP" b="0" dirty="0">
-                <a:solidFill>
-                  <a:srgbClr val="657B83"/>
-                </a:solidFill>
-                <a:effectLst/>
-                <a:latin typeface="Consolas" panose="020B0609020204030204" pitchFamily="49" charset="0"/>
-              </a:rPr>
-              <a:t>=</a:t>
-            </a:r>
-            <a:r>
-              <a:rPr lang="en-US" altLang="ja-JP" b="0" dirty="0">
-                <a:solidFill>
-                  <a:srgbClr val="2AA198"/>
-                </a:solidFill>
-                <a:effectLst/>
-                <a:latin typeface="Consolas" panose="020B0609020204030204" pitchFamily="49" charset="0"/>
-              </a:rPr>
-              <a:t>"</a:t>
-            </a:r>
-            <a:r>
-              <a:rPr lang="en-US" altLang="ja-JP" b="0" dirty="0" err="1">
-                <a:solidFill>
-                  <a:srgbClr val="268BD2"/>
-                </a:solidFill>
-                <a:effectLst/>
-                <a:latin typeface="Consolas" panose="020B0609020204030204" pitchFamily="49" charset="0"/>
-              </a:rPr>
-              <a:t>document</a:t>
-            </a:r>
-            <a:r>
-              <a:rPr lang="en-US" altLang="ja-JP" b="0" dirty="0" err="1">
-                <a:solidFill>
-                  <a:srgbClr val="2AA198"/>
-                </a:solidFill>
-                <a:effectLst/>
-                <a:latin typeface="Consolas" panose="020B0609020204030204" pitchFamily="49" charset="0"/>
-              </a:rPr>
-              <a:t>.</a:t>
-            </a:r>
-            <a:r>
-              <a:rPr lang="en-US" altLang="ja-JP" b="0" dirty="0" err="1">
-                <a:solidFill>
-                  <a:srgbClr val="268BD2"/>
-                </a:solidFill>
-                <a:effectLst/>
-                <a:latin typeface="Consolas" panose="020B0609020204030204" pitchFamily="49" charset="0"/>
-              </a:rPr>
-              <a:t>body</a:t>
-            </a:r>
-            <a:r>
-              <a:rPr lang="en-US" altLang="ja-JP" b="0" dirty="0" err="1">
-                <a:solidFill>
-                  <a:srgbClr val="2AA198"/>
-                </a:solidFill>
-                <a:effectLst/>
-                <a:latin typeface="Consolas" panose="020B0609020204030204" pitchFamily="49" charset="0"/>
-              </a:rPr>
-              <a:t>.</a:t>
-            </a:r>
-            <a:r>
-              <a:rPr lang="en-US" altLang="ja-JP" b="0" dirty="0" err="1">
-                <a:solidFill>
-                  <a:srgbClr val="268BD2"/>
-                </a:solidFill>
-                <a:effectLst/>
-                <a:latin typeface="Consolas" panose="020B0609020204030204" pitchFamily="49" charset="0"/>
-              </a:rPr>
-              <a:t>style</a:t>
-            </a:r>
-            <a:r>
-              <a:rPr lang="en-US" altLang="ja-JP" b="0" dirty="0" err="1">
-                <a:solidFill>
-                  <a:srgbClr val="2AA198"/>
-                </a:solidFill>
-                <a:effectLst/>
-                <a:latin typeface="Consolas" panose="020B0609020204030204" pitchFamily="49" charset="0"/>
-              </a:rPr>
-              <a:t>.</a:t>
-            </a:r>
-            <a:r>
-              <a:rPr lang="en-US" altLang="ja-JP" b="0" dirty="0" err="1">
-                <a:solidFill>
-                  <a:srgbClr val="268BD2"/>
-                </a:solidFill>
-                <a:effectLst/>
-                <a:latin typeface="Consolas" panose="020B0609020204030204" pitchFamily="49" charset="0"/>
-              </a:rPr>
-              <a:t>color</a:t>
-            </a:r>
-            <a:r>
-              <a:rPr lang="en-US" altLang="ja-JP" b="0" dirty="0">
-                <a:solidFill>
-                  <a:srgbClr val="859900"/>
-                </a:solidFill>
-                <a:effectLst/>
-                <a:latin typeface="Consolas" panose="020B0609020204030204" pitchFamily="49" charset="0"/>
-              </a:rPr>
-              <a:t>=</a:t>
-            </a:r>
-            <a:r>
-              <a:rPr lang="en-US" altLang="ja-JP" b="0" dirty="0">
-                <a:solidFill>
-                  <a:srgbClr val="2AA198"/>
-                </a:solidFill>
-                <a:effectLst/>
-                <a:latin typeface="Consolas" panose="020B0609020204030204" pitchFamily="49" charset="0"/>
-              </a:rPr>
-              <a:t>'red’"</a:t>
-            </a:r>
-            <a:r>
-              <a:rPr lang="en-US" altLang="ja-JP" b="0" dirty="0">
-                <a:solidFill>
-                  <a:srgbClr val="93A1A1"/>
-                </a:solidFill>
-                <a:effectLst/>
-                <a:latin typeface="Consolas" panose="020B0609020204030204" pitchFamily="49" charset="0"/>
-              </a:rPr>
-              <a:t>&gt;</a:t>
-            </a:r>
-          </a:p>
-          <a:p>
-            <a:pPr>
-              <a:lnSpc>
-                <a:spcPts val="1800"/>
-              </a:lnSpc>
-            </a:pPr>
-            <a:r>
-              <a:rPr lang="ja-JP" altLang="en-US" b="0" dirty="0">
-                <a:solidFill>
-                  <a:srgbClr val="657B83"/>
-                </a:solidFill>
-                <a:effectLst/>
-                <a:latin typeface="Consolas" panose="020B0609020204030204" pitchFamily="49" charset="0"/>
-              </a:rPr>
-              <a:t>    文字を赤くします</a:t>
-            </a:r>
-            <a:endParaRPr lang="en-US" altLang="ja-JP" b="0" dirty="0">
-              <a:solidFill>
-                <a:srgbClr val="657B83"/>
-              </a:solidFill>
-              <a:effectLst/>
-              <a:latin typeface="Consolas" panose="020B0609020204030204" pitchFamily="49" charset="0"/>
-            </a:endParaRPr>
-          </a:p>
-          <a:p>
-            <a:pPr>
-              <a:lnSpc>
-                <a:spcPts val="1800"/>
-              </a:lnSpc>
-            </a:pPr>
-            <a:r>
-              <a:rPr lang="en-US" altLang="ja-JP" b="0" dirty="0">
-                <a:solidFill>
-                  <a:srgbClr val="93A1A1"/>
-                </a:solidFill>
-                <a:effectLst/>
-                <a:latin typeface="Consolas" panose="020B0609020204030204" pitchFamily="49" charset="0"/>
-              </a:rPr>
-              <a:t>&lt;/</a:t>
-            </a:r>
-            <a:r>
-              <a:rPr lang="en-US" altLang="ja-JP" b="0" dirty="0">
-                <a:solidFill>
-                  <a:srgbClr val="268BD2"/>
-                </a:solidFill>
-                <a:effectLst/>
-                <a:latin typeface="Consolas" panose="020B0609020204030204" pitchFamily="49" charset="0"/>
-              </a:rPr>
-              <a:t>button</a:t>
-            </a:r>
-            <a:r>
-              <a:rPr lang="en-US" altLang="ja-JP" b="0" dirty="0">
-                <a:solidFill>
-                  <a:srgbClr val="93A1A1"/>
-                </a:solidFill>
-                <a:effectLst/>
-                <a:latin typeface="Consolas" panose="020B0609020204030204" pitchFamily="49" charset="0"/>
-              </a:rPr>
-              <a:t>&gt;</a:t>
-            </a:r>
-            <a:endParaRPr lang="en-US" altLang="ja-JP" b="0" dirty="0">
-              <a:solidFill>
-                <a:srgbClr val="657B83"/>
-              </a:solidFill>
-              <a:effectLst/>
-              <a:latin typeface="Consolas" panose="020B0609020204030204" pitchFamily="49" charset="0"/>
-            </a:endParaRPr>
-          </a:p>
-        </p:txBody>
-      </p:sp>
-      <p:sp>
-        <p:nvSpPr>
-          <p:cNvPr id="4" name="テキスト ボックス 3">
-            <a:extLst>
-              <a:ext uri="{FF2B5EF4-FFF2-40B4-BE49-F238E27FC236}">
-                <a16:creationId xmlns:a16="http://schemas.microsoft.com/office/drawing/2014/main" id="{EEE52158-02B9-098D-1232-536FCF673AC7}"/>
-              </a:ext>
-            </a:extLst>
-          </p:cNvPr>
-          <p:cNvSpPr txBox="1"/>
-          <p:nvPr/>
-        </p:nvSpPr>
-        <p:spPr>
-          <a:xfrm>
-            <a:off x="3054943" y="2254568"/>
-            <a:ext cx="6082114" cy="1200329"/>
-          </a:xfrm>
-          <a:prstGeom prst="rect">
-            <a:avLst/>
-          </a:prstGeom>
-          <a:noFill/>
-        </p:spPr>
-        <p:txBody>
-          <a:bodyPr wrap="none" rtlCol="0">
-            <a:spAutoFit/>
-          </a:bodyPr>
-          <a:lstStyle/>
-          <a:p>
-            <a:r>
-              <a:rPr lang="ja-JP" altLang="en-US" b="0" dirty="0">
-                <a:effectLst/>
-                <a:latin typeface="Consolas" panose="020B0609020204030204" pitchFamily="49" charset="0"/>
-              </a:rPr>
-              <a:t>ボタンをクリックすると</a:t>
-            </a:r>
-            <a:endParaRPr lang="en-US" altLang="ja-JP" b="0" dirty="0">
-              <a:effectLst/>
-              <a:latin typeface="Consolas" panose="020B0609020204030204" pitchFamily="49" charset="0"/>
-            </a:endParaRPr>
-          </a:p>
-          <a:p>
-            <a:r>
-              <a:rPr lang="ja-JP" altLang="en-US" b="0" dirty="0">
-                <a:solidFill>
-                  <a:srgbClr val="268BD2"/>
-                </a:solidFill>
-                <a:effectLst/>
-                <a:latin typeface="Consolas" panose="020B0609020204030204" pitchFamily="49" charset="0"/>
-              </a:rPr>
-              <a:t>「</a:t>
-            </a:r>
-            <a:r>
-              <a:rPr lang="en-US" altLang="ja-JP" b="0" dirty="0" err="1">
-                <a:solidFill>
-                  <a:srgbClr val="268BD2"/>
-                </a:solidFill>
-                <a:effectLst/>
-                <a:latin typeface="Consolas" panose="020B0609020204030204" pitchFamily="49" charset="0"/>
-              </a:rPr>
-              <a:t>document</a:t>
-            </a:r>
-            <a:r>
-              <a:rPr lang="en-US" altLang="ja-JP" b="0" dirty="0" err="1">
-                <a:solidFill>
-                  <a:srgbClr val="2AA198"/>
-                </a:solidFill>
-                <a:effectLst/>
-                <a:latin typeface="Consolas" panose="020B0609020204030204" pitchFamily="49" charset="0"/>
-              </a:rPr>
-              <a:t>.</a:t>
-            </a:r>
-            <a:r>
-              <a:rPr lang="en-US" altLang="ja-JP" b="0" dirty="0" err="1">
-                <a:solidFill>
-                  <a:srgbClr val="268BD2"/>
-                </a:solidFill>
-                <a:effectLst/>
-                <a:latin typeface="Consolas" panose="020B0609020204030204" pitchFamily="49" charset="0"/>
-              </a:rPr>
-              <a:t>body</a:t>
-            </a:r>
-            <a:r>
-              <a:rPr lang="en-US" altLang="ja-JP" b="0" dirty="0" err="1">
-                <a:solidFill>
-                  <a:srgbClr val="2AA198"/>
-                </a:solidFill>
-                <a:effectLst/>
-                <a:latin typeface="Consolas" panose="020B0609020204030204" pitchFamily="49" charset="0"/>
-              </a:rPr>
-              <a:t>.</a:t>
-            </a:r>
-            <a:r>
-              <a:rPr lang="en-US" altLang="ja-JP" b="0" dirty="0" err="1">
-                <a:solidFill>
-                  <a:srgbClr val="268BD2"/>
-                </a:solidFill>
-                <a:effectLst/>
-                <a:latin typeface="Consolas" panose="020B0609020204030204" pitchFamily="49" charset="0"/>
-              </a:rPr>
-              <a:t>style</a:t>
-            </a:r>
-            <a:r>
-              <a:rPr lang="en-US" altLang="ja-JP" b="0" dirty="0" err="1">
-                <a:solidFill>
-                  <a:srgbClr val="2AA198"/>
-                </a:solidFill>
-                <a:effectLst/>
-                <a:latin typeface="Consolas" panose="020B0609020204030204" pitchFamily="49" charset="0"/>
-              </a:rPr>
-              <a:t>.</a:t>
-            </a:r>
-            <a:r>
-              <a:rPr lang="en-US" altLang="ja-JP" b="0" dirty="0" err="1">
-                <a:solidFill>
-                  <a:srgbClr val="268BD2"/>
-                </a:solidFill>
-                <a:effectLst/>
-                <a:latin typeface="Consolas" panose="020B0609020204030204" pitchFamily="49" charset="0"/>
-              </a:rPr>
-              <a:t>color</a:t>
-            </a:r>
-            <a:r>
-              <a:rPr lang="ja-JP" altLang="en-US" b="0" dirty="0">
-                <a:solidFill>
-                  <a:srgbClr val="268BD2"/>
-                </a:solidFill>
-                <a:effectLst/>
-                <a:latin typeface="Consolas" panose="020B0609020204030204" pitchFamily="49" charset="0"/>
-              </a:rPr>
-              <a:t>」</a:t>
-            </a:r>
-            <a:endParaRPr lang="en-US" altLang="ja-JP" b="0" dirty="0">
-              <a:solidFill>
-                <a:srgbClr val="268BD2"/>
-              </a:solidFill>
-              <a:effectLst/>
-              <a:latin typeface="Consolas" panose="020B0609020204030204" pitchFamily="49" charset="0"/>
-            </a:endParaRPr>
-          </a:p>
-          <a:p>
-            <a:r>
-              <a:rPr kumimoji="1" lang="ja-JP" altLang="en-US" dirty="0">
-                <a:latin typeface="Consolas" panose="020B0609020204030204" pitchFamily="49" charset="0"/>
-              </a:rPr>
-              <a:t>というプロパティを</a:t>
-            </a:r>
-            <a:r>
-              <a:rPr kumimoji="1" lang="en-US" altLang="ja-JP" dirty="0">
-                <a:latin typeface="Consolas" panose="020B0609020204030204" pitchFamily="49" charset="0"/>
-              </a:rPr>
-              <a:t>’red’</a:t>
-            </a:r>
-            <a:r>
-              <a:rPr kumimoji="1" lang="ja-JP" altLang="en-US" dirty="0">
-                <a:latin typeface="Consolas" panose="020B0609020204030204" pitchFamily="49" charset="0"/>
-              </a:rPr>
-              <a:t>に変更</a:t>
-            </a:r>
-            <a:r>
-              <a:rPr kumimoji="1" lang="en-US" altLang="ja-JP" dirty="0">
-                <a:latin typeface="Consolas" panose="020B0609020204030204" pitchFamily="49" charset="0"/>
-              </a:rPr>
-              <a:t>(</a:t>
-            </a:r>
-            <a:r>
-              <a:rPr kumimoji="1" lang="ja-JP" altLang="en-US" dirty="0">
-                <a:latin typeface="Consolas" panose="020B0609020204030204" pitchFamily="49" charset="0"/>
-              </a:rPr>
-              <a:t>へんこう</a:t>
-            </a:r>
-            <a:r>
-              <a:rPr kumimoji="1" lang="en-US" altLang="ja-JP" dirty="0">
-                <a:latin typeface="Consolas" panose="020B0609020204030204" pitchFamily="49" charset="0"/>
-              </a:rPr>
-              <a:t>)</a:t>
-            </a:r>
-            <a:r>
-              <a:rPr kumimoji="1" lang="ja-JP" altLang="en-US" dirty="0">
-                <a:latin typeface="Consolas" panose="020B0609020204030204" pitchFamily="49" charset="0"/>
-              </a:rPr>
-              <a:t> して</a:t>
-            </a:r>
-            <a:endParaRPr kumimoji="1" lang="en-US" altLang="ja-JP" dirty="0">
-              <a:latin typeface="Consolas" panose="020B0609020204030204" pitchFamily="49" charset="0"/>
-            </a:endParaRPr>
-          </a:p>
-          <a:p>
-            <a:r>
-              <a:rPr lang="ja-JP" altLang="en-US" dirty="0"/>
-              <a:t>「</a:t>
-            </a:r>
-            <a:r>
-              <a:rPr lang="en-US" altLang="ja-JP" dirty="0"/>
-              <a:t>body</a:t>
-            </a:r>
-            <a:r>
-              <a:rPr lang="ja-JP" altLang="en-US" dirty="0"/>
-              <a:t>」の中</a:t>
-            </a:r>
-            <a:r>
-              <a:rPr lang="en-US" altLang="ja-JP" dirty="0"/>
-              <a:t>(</a:t>
-            </a:r>
-            <a:r>
-              <a:rPr lang="ja-JP" altLang="en-US" dirty="0"/>
-              <a:t>なか</a:t>
-            </a:r>
-            <a:r>
-              <a:rPr lang="en-US" altLang="ja-JP" dirty="0"/>
-              <a:t>)</a:t>
-            </a:r>
-            <a:r>
-              <a:rPr lang="ja-JP" altLang="en-US" dirty="0"/>
-              <a:t> の</a:t>
-            </a:r>
-            <a:r>
-              <a:rPr kumimoji="1" lang="ja-JP" altLang="en-US" dirty="0"/>
-              <a:t>文字</a:t>
-            </a:r>
-            <a:r>
-              <a:rPr lang="en-US" altLang="ja-JP" dirty="0"/>
-              <a:t>(</a:t>
-            </a:r>
-            <a:r>
-              <a:rPr lang="ja-JP" altLang="en-US" dirty="0"/>
-              <a:t>もじ</a:t>
-            </a:r>
-            <a:r>
-              <a:rPr kumimoji="1" lang="en-US" altLang="ja-JP" dirty="0"/>
-              <a:t>)</a:t>
-            </a:r>
-            <a:r>
-              <a:rPr kumimoji="1" lang="ja-JP" altLang="en-US" dirty="0"/>
-              <a:t>を赤</a:t>
-            </a:r>
-            <a:r>
-              <a:rPr kumimoji="1" lang="en-US" altLang="ja-JP" dirty="0"/>
-              <a:t>(</a:t>
-            </a:r>
-            <a:r>
-              <a:rPr kumimoji="1" lang="ja-JP" altLang="en-US" dirty="0"/>
-              <a:t>あか</a:t>
-            </a:r>
-            <a:r>
-              <a:rPr kumimoji="1" lang="en-US" altLang="ja-JP" dirty="0"/>
-              <a:t>)</a:t>
-            </a:r>
-            <a:r>
-              <a:rPr kumimoji="1" lang="ja-JP" altLang="en-US" dirty="0"/>
-              <a:t>くします。</a:t>
-            </a:r>
-          </a:p>
-        </p:txBody>
-      </p:sp>
-      <p:pic>
-        <p:nvPicPr>
-          <p:cNvPr id="6" name="図 5">
-            <a:extLst>
-              <a:ext uri="{FF2B5EF4-FFF2-40B4-BE49-F238E27FC236}">
-                <a16:creationId xmlns:a16="http://schemas.microsoft.com/office/drawing/2014/main" id="{E8248525-E175-A6F2-FE19-2F9826D078EE}"/>
-              </a:ext>
-            </a:extLst>
-          </p:cNvPr>
-          <p:cNvPicPr>
-            <a:picLocks noChangeAspect="1"/>
-          </p:cNvPicPr>
-          <p:nvPr/>
-        </p:nvPicPr>
-        <p:blipFill>
-          <a:blip r:embed="rId2"/>
-          <a:stretch>
-            <a:fillRect/>
-          </a:stretch>
-        </p:blipFill>
-        <p:spPr>
-          <a:xfrm>
-            <a:off x="1287618" y="3841980"/>
-            <a:ext cx="4277322" cy="2095792"/>
-          </a:xfrm>
-          <a:prstGeom prst="rect">
-            <a:avLst/>
-          </a:prstGeom>
-        </p:spPr>
-      </p:pic>
-      <p:pic>
-        <p:nvPicPr>
-          <p:cNvPr id="10" name="図 9">
-            <a:extLst>
-              <a:ext uri="{FF2B5EF4-FFF2-40B4-BE49-F238E27FC236}">
-                <a16:creationId xmlns:a16="http://schemas.microsoft.com/office/drawing/2014/main" id="{C8B35828-F30F-8A83-E4DF-B7E94854FF2B}"/>
-              </a:ext>
-            </a:extLst>
-          </p:cNvPr>
-          <p:cNvPicPr>
-            <a:picLocks noChangeAspect="1"/>
-          </p:cNvPicPr>
-          <p:nvPr/>
-        </p:nvPicPr>
-        <p:blipFill>
-          <a:blip r:embed="rId3"/>
-          <a:stretch>
-            <a:fillRect/>
-          </a:stretch>
-        </p:blipFill>
-        <p:spPr>
-          <a:xfrm>
-            <a:off x="6798534" y="3782750"/>
-            <a:ext cx="4105848" cy="2095792"/>
-          </a:xfrm>
-          <a:prstGeom prst="rect">
-            <a:avLst/>
-          </a:prstGeom>
-        </p:spPr>
-      </p:pic>
-      <p:sp>
-        <p:nvSpPr>
-          <p:cNvPr id="11" name="矢印: 右 10">
-            <a:extLst>
-              <a:ext uri="{FF2B5EF4-FFF2-40B4-BE49-F238E27FC236}">
-                <a16:creationId xmlns:a16="http://schemas.microsoft.com/office/drawing/2014/main" id="{ECCCD168-F171-8B0A-55A5-00773E38266B}"/>
-              </a:ext>
-            </a:extLst>
-          </p:cNvPr>
-          <p:cNvSpPr/>
-          <p:nvPr/>
-        </p:nvSpPr>
-        <p:spPr>
-          <a:xfrm>
-            <a:off x="5564940" y="4595056"/>
-            <a:ext cx="531060" cy="317232"/>
-          </a:xfrm>
-          <a:prstGeom prst="rightArrow">
-            <a:avLst/>
-          </a:prstGeom>
-        </p:spPr>
-        <p:style>
-          <a:lnRef idx="2">
-            <a:schemeClr val="accent1">
-              <a:shade val="15000"/>
-            </a:schemeClr>
-          </a:lnRef>
-          <a:fillRef idx="1">
-            <a:schemeClr val="accent1"/>
-          </a:fillRef>
-          <a:effectRef idx="0">
-            <a:schemeClr val="accent1"/>
-          </a:effectRef>
-          <a:fontRef idx="minor">
-            <a:schemeClr val="lt1"/>
-          </a:fontRef>
-        </p:style>
-        <p:txBody>
-          <a:bodyPr rtlCol="0" anchor="ctr"/>
-          <a:lstStyle/>
-          <a:p>
-            <a:pPr algn="ctr"/>
-            <a:endParaRPr kumimoji="1" lang="ja-JP" altLang="en-US"/>
-          </a:p>
-        </p:txBody>
-      </p:sp>
-      <p:sp>
-        <p:nvSpPr>
-          <p:cNvPr id="12" name="テキスト ボックス 11">
-            <a:extLst>
-              <a:ext uri="{FF2B5EF4-FFF2-40B4-BE49-F238E27FC236}">
-                <a16:creationId xmlns:a16="http://schemas.microsoft.com/office/drawing/2014/main" id="{35E03359-680F-287F-3949-0B20059B694B}"/>
-              </a:ext>
-            </a:extLst>
-          </p:cNvPr>
-          <p:cNvSpPr txBox="1"/>
-          <p:nvPr/>
-        </p:nvSpPr>
-        <p:spPr>
-          <a:xfrm>
-            <a:off x="771524" y="386121"/>
-            <a:ext cx="1800493" cy="369332"/>
-          </a:xfrm>
-          <a:prstGeom prst="rect">
-            <a:avLst/>
-          </a:prstGeom>
-          <a:noFill/>
-        </p:spPr>
-        <p:txBody>
-          <a:bodyPr wrap="none" rtlCol="0">
-            <a:spAutoFit/>
-          </a:bodyPr>
-          <a:lstStyle/>
-          <a:p>
-            <a:r>
-              <a:rPr kumimoji="1" lang="en-US" altLang="ja-JP" b="1" dirty="0"/>
-              <a:t>JavaScript</a:t>
-            </a:r>
-            <a:r>
-              <a:rPr kumimoji="1" lang="ja-JP" altLang="en-US" b="1" dirty="0"/>
-              <a:t>の例</a:t>
-            </a:r>
-          </a:p>
-        </p:txBody>
-      </p:sp>
-    </p:spTree>
-    <p:extLst>
-      <p:ext uri="{BB962C8B-B14F-4D97-AF65-F5344CB8AC3E}">
-        <p14:creationId xmlns:p14="http://schemas.microsoft.com/office/powerpoint/2010/main" val="774859858"/>
-      </p:ext>
-    </p:extLst>
-  </p:cSld>
-  <p:clrMapOvr>
-    <a:masterClrMapping/>
-  </p:clrMapOvr>
-</p:sld>
-</file>
-
-<file path=ppt/slides/slide8.xml><?xml version="1.0" encoding="utf-8"?>
-<p:sld xmlns:a="http://schemas.openxmlformats.org/drawingml/2006/main" xmlns:r="http://schemas.openxmlformats.org/officeDocument/2006/relationships" xmlns:p="http://schemas.openxmlformats.org/presentationml/2006/main">
-  <p:cSld>
-    <p:spTree>
-      <p:nvGrpSpPr>
-        <p:cNvPr id="1" name="">
-          <a:extLst>
-            <a:ext uri="{FF2B5EF4-FFF2-40B4-BE49-F238E27FC236}">
-              <a16:creationId xmlns:a16="http://schemas.microsoft.com/office/drawing/2014/main" id="{8B63329D-6D45-7F87-CFF4-D1227630C0F3}"/>
-            </a:ext>
-          </a:extLst>
-        </p:cNvPr>
-        <p:cNvGrpSpPr/>
-        <p:nvPr/>
-      </p:nvGrpSpPr>
-      <p:grpSpPr>
-        <a:xfrm>
-          <a:off x="0" y="0"/>
-          <a:ext cx="0" cy="0"/>
-          <a:chOff x="0" y="0"/>
-          <a:chExt cx="0" cy="0"/>
-        </a:xfrm>
-      </p:grpSpPr>
-      <p:sp>
-        <p:nvSpPr>
-          <p:cNvPr id="2" name="テキスト ボックス 1">
-            <a:extLst>
-              <a:ext uri="{FF2B5EF4-FFF2-40B4-BE49-F238E27FC236}">
-                <a16:creationId xmlns:a16="http://schemas.microsoft.com/office/drawing/2014/main" id="{7B8128FC-C783-EEC2-5605-E0500C2B380F}"/>
-              </a:ext>
-            </a:extLst>
-          </p:cNvPr>
-          <p:cNvSpPr txBox="1"/>
-          <p:nvPr/>
-        </p:nvSpPr>
-        <p:spPr>
-          <a:xfrm>
-            <a:off x="1279616" y="2767280"/>
-            <a:ext cx="9700091" cy="1938992"/>
-          </a:xfrm>
-          <a:prstGeom prst="rect">
-            <a:avLst/>
-          </a:prstGeom>
-          <a:noFill/>
-        </p:spPr>
-        <p:txBody>
-          <a:bodyPr wrap="none" rtlCol="0">
-            <a:spAutoFit/>
-          </a:bodyPr>
-          <a:lstStyle/>
-          <a:p>
-            <a:r>
-              <a:rPr kumimoji="1" lang="en-US" altLang="ja-JP" sz="4000" dirty="0"/>
-              <a:t>【</a:t>
-            </a:r>
-            <a:r>
-              <a:rPr kumimoji="1" lang="ja-JP" altLang="en-US" sz="4000" dirty="0"/>
-              <a:t>たとえ</a:t>
-            </a:r>
-            <a:r>
-              <a:rPr kumimoji="1" lang="en-US" altLang="ja-JP" sz="4000" dirty="0"/>
-              <a:t>】</a:t>
-            </a:r>
-          </a:p>
-          <a:p>
-            <a:r>
-              <a:rPr kumimoji="1" lang="ja-JP" altLang="en-US" sz="4000" dirty="0"/>
-              <a:t>「機械</a:t>
-            </a:r>
-            <a:r>
-              <a:rPr kumimoji="1" lang="en-US" altLang="ja-JP" sz="4000" dirty="0"/>
-              <a:t>(</a:t>
-            </a:r>
-            <a:r>
-              <a:rPr kumimoji="1" lang="ja-JP" altLang="en-US" sz="4000" dirty="0"/>
-              <a:t>きかい</a:t>
-            </a:r>
-            <a:r>
-              <a:rPr kumimoji="1" lang="en-US" altLang="ja-JP" sz="4000" dirty="0"/>
-              <a:t>)</a:t>
-            </a:r>
-            <a:r>
-              <a:rPr lang="ja-JP" altLang="en-US" sz="4000" dirty="0"/>
-              <a:t>の</a:t>
-            </a:r>
-            <a:r>
-              <a:rPr kumimoji="1" lang="ja-JP" altLang="en-US" sz="4000" dirty="0"/>
-              <a:t>修理</a:t>
-            </a:r>
-            <a:r>
-              <a:rPr kumimoji="1" lang="en-US" altLang="ja-JP" sz="4000" dirty="0"/>
-              <a:t>(</a:t>
-            </a:r>
-            <a:r>
-              <a:rPr kumimoji="1" lang="ja-JP" altLang="en-US" sz="4000" dirty="0"/>
-              <a:t>しゅうり</a:t>
-            </a:r>
-            <a:r>
-              <a:rPr kumimoji="1" lang="en-US" altLang="ja-JP" sz="4000" dirty="0"/>
-              <a:t>)</a:t>
-            </a:r>
-            <a:r>
-              <a:rPr kumimoji="1" lang="ja-JP" altLang="en-US" sz="4000" dirty="0"/>
-              <a:t>をする」</a:t>
-            </a:r>
-            <a:endParaRPr kumimoji="1" lang="en-US" altLang="ja-JP" sz="4000" dirty="0"/>
-          </a:p>
-          <a:p>
-            <a:r>
-              <a:rPr lang="ja-JP" altLang="en-US" sz="4000" dirty="0"/>
-              <a:t>と命令</a:t>
-            </a:r>
-            <a:r>
-              <a:rPr lang="en-US" altLang="ja-JP" sz="4000" dirty="0"/>
-              <a:t>(</a:t>
-            </a:r>
-            <a:r>
-              <a:rPr lang="ja-JP" altLang="en-US" sz="4000" dirty="0"/>
-              <a:t>めいれい</a:t>
-            </a:r>
-            <a:r>
-              <a:rPr lang="en-US" altLang="ja-JP" sz="4000" dirty="0"/>
-              <a:t>)</a:t>
-            </a:r>
-            <a:r>
-              <a:rPr lang="ja-JP" altLang="en-US" sz="4000" dirty="0"/>
-              <a:t>する</a:t>
-            </a:r>
-            <a:endParaRPr kumimoji="1" lang="ja-JP" altLang="en-US" sz="4000" dirty="0"/>
-          </a:p>
-        </p:txBody>
-      </p:sp>
-      <p:sp>
-        <p:nvSpPr>
-          <p:cNvPr id="4" name="テキスト ボックス 3">
-            <a:extLst>
-              <a:ext uri="{FF2B5EF4-FFF2-40B4-BE49-F238E27FC236}">
-                <a16:creationId xmlns:a16="http://schemas.microsoft.com/office/drawing/2014/main" id="{3F3CDD36-AA72-8497-4BBD-CB9ACBBC975C}"/>
-              </a:ext>
-            </a:extLst>
-          </p:cNvPr>
-          <p:cNvSpPr txBox="1"/>
-          <p:nvPr/>
-        </p:nvSpPr>
-        <p:spPr>
-          <a:xfrm>
-            <a:off x="532712" y="391885"/>
-            <a:ext cx="6433171" cy="646331"/>
-          </a:xfrm>
-          <a:prstGeom prst="rect">
-            <a:avLst/>
-          </a:prstGeom>
-          <a:noFill/>
-        </p:spPr>
-        <p:txBody>
-          <a:bodyPr wrap="none" rtlCol="0">
-            <a:spAutoFit/>
-          </a:bodyPr>
-          <a:lstStyle/>
-          <a:p>
-            <a:r>
-              <a:rPr kumimoji="1" lang="en-US" altLang="ja-JP" sz="3600" b="1" dirty="0"/>
-              <a:t>II.</a:t>
-            </a:r>
-            <a:r>
-              <a:rPr kumimoji="1" lang="ja-JP" altLang="en-US" sz="3600" b="1" dirty="0"/>
-              <a:t>メソッドを呼</a:t>
-            </a:r>
-            <a:r>
-              <a:rPr kumimoji="1" lang="en-US" altLang="ja-JP" sz="3600" b="1" dirty="0"/>
-              <a:t>(</a:t>
-            </a:r>
-            <a:r>
-              <a:rPr kumimoji="1" lang="ja-JP" altLang="en-US" sz="3600" b="1" dirty="0"/>
-              <a:t>よ</a:t>
-            </a:r>
-            <a:r>
-              <a:rPr kumimoji="1" lang="en-US" altLang="ja-JP" sz="3600" b="1" dirty="0"/>
-              <a:t>)</a:t>
-            </a:r>
-            <a:r>
-              <a:rPr kumimoji="1" lang="ja-JP" altLang="en-US" sz="3600" b="1" dirty="0"/>
-              <a:t>び出</a:t>
-            </a:r>
-            <a:r>
-              <a:rPr kumimoji="1" lang="en-US" altLang="ja-JP" sz="3600" b="1" dirty="0"/>
-              <a:t>(</a:t>
-            </a:r>
-            <a:r>
-              <a:rPr kumimoji="1" lang="ja-JP" altLang="en-US" sz="3600" b="1" dirty="0"/>
-              <a:t>だ</a:t>
-            </a:r>
-            <a:r>
-              <a:rPr kumimoji="1" lang="en-US" altLang="ja-JP" sz="3600" b="1" dirty="0"/>
-              <a:t>)</a:t>
-            </a:r>
-            <a:r>
-              <a:rPr kumimoji="1" lang="ja-JP" altLang="en-US" sz="3600" b="1" dirty="0"/>
-              <a:t>す</a:t>
-            </a:r>
-          </a:p>
-        </p:txBody>
-      </p:sp>
-    </p:spTree>
-    <p:extLst>
-      <p:ext uri="{BB962C8B-B14F-4D97-AF65-F5344CB8AC3E}">
-        <p14:creationId xmlns:p14="http://schemas.microsoft.com/office/powerpoint/2010/main" val="4182217032"/>
-      </p:ext>
-    </p:extLst>
-  </p:cSld>
-  <p:clrMapOvr>
-    <a:masterClrMapping/>
-  </p:clrMapOvr>
-</p:sld>
-</file>
-
-<file path=ppt/slides/slide9.xml><?xml version="1.0" encoding="utf-8"?>
-<p:sld xmlns:a="http://schemas.openxmlformats.org/drawingml/2006/main" xmlns:r="http://schemas.openxmlformats.org/officeDocument/2006/relationships" xmlns:p="http://schemas.openxmlformats.org/presentationml/2006/main">
-  <p:cSld>
-    <p:spTree>
-      <p:nvGrpSpPr>
-        <p:cNvPr id="1" name="">
-          <a:extLst>
-            <a:ext uri="{FF2B5EF4-FFF2-40B4-BE49-F238E27FC236}">
-              <a16:creationId xmlns:a16="http://schemas.microsoft.com/office/drawing/2014/main" id="{67CFF450-2D2C-D654-DC6E-77E88011A724}"/>
-            </a:ext>
-          </a:extLst>
-        </p:cNvPr>
-        <p:cNvGrpSpPr/>
-        <p:nvPr/>
-      </p:nvGrpSpPr>
-      <p:grpSpPr>
-        <a:xfrm>
-          <a:off x="0" y="0"/>
-          <a:ext cx="0" cy="0"/>
-          <a:chOff x="0" y="0"/>
-          <a:chExt cx="0" cy="0"/>
-        </a:xfrm>
-      </p:grpSpPr>
-      <p:pic>
-        <p:nvPicPr>
-          <p:cNvPr id="5" name="図 4" descr="挿絵 が含まれている画像&#10;&#10;AI によって生成されたコンテンツは間違っている可能性があります。">
-            <a:extLst>
-              <a:ext uri="{FF2B5EF4-FFF2-40B4-BE49-F238E27FC236}">
-                <a16:creationId xmlns:a16="http://schemas.microsoft.com/office/drawing/2014/main" id="{D653FB27-E6D6-F6DA-BD8F-110223400052}"/>
-              </a:ext>
-            </a:extLst>
-          </p:cNvPr>
-          <p:cNvPicPr>
-            <a:picLocks noChangeAspect="1"/>
-          </p:cNvPicPr>
-          <p:nvPr/>
-        </p:nvPicPr>
-        <p:blipFill>
-          <a:blip r:embed="rId2">
-            <a:extLst>
-              <a:ext uri="{28A0092B-C50C-407E-A947-70E740481C1C}">
-                <a14:useLocalDpi xmlns:a14="http://schemas.microsoft.com/office/drawing/2010/main" val="0"/>
-              </a:ext>
-            </a:extLst>
-          </a:blip>
-          <a:stretch>
-            <a:fillRect/>
-          </a:stretch>
-        </p:blipFill>
-        <p:spPr>
-          <a:xfrm>
-            <a:off x="3810000" y="0"/>
-            <a:ext cx="4572000" cy="6858000"/>
-          </a:xfrm>
-          <a:prstGeom prst="rect">
-            <a:avLst/>
-          </a:prstGeom>
-        </p:spPr>
-      </p:pic>
-      <p:graphicFrame>
-        <p:nvGraphicFramePr>
-          <p:cNvPr id="2" name="表 1">
-            <a:extLst>
-              <a:ext uri="{FF2B5EF4-FFF2-40B4-BE49-F238E27FC236}">
-                <a16:creationId xmlns:a16="http://schemas.microsoft.com/office/drawing/2014/main" id="{4F879B7A-13D3-8D7B-3605-8A908DF48E10}"/>
-              </a:ext>
-            </a:extLst>
-          </p:cNvPr>
-          <p:cNvGraphicFramePr>
-            <a:graphicFrameLocks noGrp="1"/>
-          </p:cNvGraphicFramePr>
-          <p:nvPr/>
-        </p:nvGraphicFramePr>
-        <p:xfrm>
-          <a:off x="7805057" y="728334"/>
-          <a:ext cx="3992335" cy="3877222"/>
-        </p:xfrm>
-        <a:graphic>
-          <a:graphicData uri="http://schemas.openxmlformats.org/drawingml/2006/table">
-            <a:tbl>
-              <a:tblPr firstRow="1" bandRow="1">
-                <a:tableStyleId>{5C22544A-7EE6-4342-B048-85BDC9FD1C3A}</a:tableStyleId>
-              </a:tblPr>
-              <a:tblGrid>
-                <a:gridCol w="3992335">
-                  <a:extLst>
-                    <a:ext uri="{9D8B030D-6E8A-4147-A177-3AD203B41FA5}">
-                      <a16:colId xmlns:a16="http://schemas.microsoft.com/office/drawing/2014/main" val="1828524323"/>
-                    </a:ext>
-                  </a:extLst>
-                </a:gridCol>
-              </a:tblGrid>
-              <a:tr h="1118724">
-                <a:tc>
-                  <a:txBody>
-                    <a:bodyPr/>
-                    <a:lstStyle/>
-                    <a:p>
-                      <a:r>
-                        <a:rPr kumimoji="1" lang="ja-JP" altLang="en-US" dirty="0"/>
-                        <a:t>プロパティ</a:t>
-                      </a:r>
-                      <a:endParaRPr kumimoji="1" lang="en-US" altLang="ja-JP" dirty="0"/>
-                    </a:p>
-                    <a:p>
-                      <a:pPr marL="285750" indent="-285750">
-                        <a:buFont typeface="Arial" panose="020B0604020202020204" pitchFamily="34" charset="0"/>
-                        <a:buChar char="•"/>
-                      </a:pPr>
-                      <a:r>
-                        <a:rPr kumimoji="1" lang="ja-JP" altLang="en-US" sz="1400" dirty="0">
-                          <a:latin typeface="+mj-ea"/>
-                          <a:ea typeface="+mj-ea"/>
-                        </a:rPr>
-                        <a:t>オブジェクトの様子</a:t>
-                      </a:r>
-                      <a:endParaRPr kumimoji="1" lang="en-US" altLang="ja-JP" sz="1400" dirty="0">
-                        <a:latin typeface="+mj-ea"/>
-                        <a:ea typeface="+mj-ea"/>
-                      </a:endParaRPr>
-                    </a:p>
-                    <a:p>
-                      <a:pPr marL="285750" indent="-285750">
-                        <a:buFont typeface="Arial" panose="020B0604020202020204" pitchFamily="34" charset="0"/>
-                        <a:buChar char="•"/>
-                      </a:pPr>
-                      <a:r>
-                        <a:rPr kumimoji="1" lang="ja-JP" altLang="en-US" sz="1400" dirty="0">
-                          <a:latin typeface="+mj-ea"/>
-                          <a:ea typeface="+mj-ea"/>
-                        </a:rPr>
-                        <a:t>オブジェクトの持ち物</a:t>
-                      </a:r>
-                      <a:endParaRPr kumimoji="1" lang="en-US" altLang="ja-JP" sz="1400" dirty="0">
-                        <a:latin typeface="+mj-ea"/>
-                        <a:ea typeface="+mj-ea"/>
-                      </a:endParaRPr>
-                    </a:p>
-                    <a:p>
-                      <a:pPr marL="0" indent="0" algn="r">
-                        <a:buFontTx/>
-                        <a:buNone/>
-                      </a:pPr>
-                      <a:r>
-                        <a:rPr kumimoji="1" lang="ja-JP" altLang="en-US" sz="1400" dirty="0">
-                          <a:latin typeface="+mj-ea"/>
-                          <a:ea typeface="+mj-ea"/>
-                        </a:rPr>
-                        <a:t>など</a:t>
-                      </a:r>
-                    </a:p>
-                  </a:txBody>
-                  <a:tcPr/>
-                </a:tc>
-                <a:extLst>
-                  <a:ext uri="{0D108BD9-81ED-4DB2-BD59-A6C34878D82A}">
-                    <a16:rowId xmlns:a16="http://schemas.microsoft.com/office/drawing/2014/main" val="3101971193"/>
-                  </a:ext>
-                </a:extLst>
-              </a:tr>
-              <a:tr h="2758498">
-                <a:tc>
-                  <a:txBody>
-                    <a:bodyPr/>
-                    <a:lstStyle/>
-                    <a:p>
-                      <a:r>
-                        <a:rPr kumimoji="1" lang="ja-JP" altLang="en-US" dirty="0"/>
-                        <a:t>着ている服の色：</a:t>
-                      </a:r>
-                      <a:r>
-                        <a:rPr kumimoji="1" lang="ja-JP" altLang="en-US" b="1" dirty="0">
-                          <a:solidFill>
-                            <a:srgbClr val="FF0000"/>
-                          </a:solidFill>
-                        </a:rPr>
-                        <a:t>赤</a:t>
-                      </a:r>
-                      <a:endParaRPr kumimoji="1" lang="en-US" altLang="ja-JP" b="1" dirty="0">
-                        <a:solidFill>
-                          <a:srgbClr val="FF0000"/>
-                        </a:solidFill>
-                      </a:endParaRPr>
-                    </a:p>
-                    <a:p>
-                      <a:r>
-                        <a:rPr kumimoji="1" lang="ja-JP" altLang="en-US" dirty="0"/>
-                        <a:t>履いている靴の色：ベージュ</a:t>
-                      </a:r>
-                      <a:endParaRPr kumimoji="1" lang="en-US" altLang="ja-JP" dirty="0"/>
-                    </a:p>
-                    <a:p>
-                      <a:r>
-                        <a:rPr kumimoji="1" lang="ja-JP" altLang="en-US" dirty="0"/>
-                        <a:t>髪：ショートヘア</a:t>
-                      </a:r>
-                      <a:endParaRPr kumimoji="1" lang="en-US" altLang="ja-JP" dirty="0"/>
-                    </a:p>
-                    <a:p>
-                      <a:r>
-                        <a:rPr kumimoji="1" lang="ja-JP" altLang="en-US" dirty="0"/>
-                        <a:t>カバンの種類：ショルダーバッグ</a:t>
-                      </a:r>
-                    </a:p>
-                  </a:txBody>
-                  <a:tcPr/>
-                </a:tc>
-                <a:extLst>
-                  <a:ext uri="{0D108BD9-81ED-4DB2-BD59-A6C34878D82A}">
-                    <a16:rowId xmlns:a16="http://schemas.microsoft.com/office/drawing/2014/main" val="1998050814"/>
-                  </a:ext>
-                </a:extLst>
-              </a:tr>
-            </a:tbl>
-          </a:graphicData>
-        </a:graphic>
-      </p:graphicFrame>
-      <p:graphicFrame>
-        <p:nvGraphicFramePr>
-          <p:cNvPr id="3" name="表 2">
-            <a:extLst>
-              <a:ext uri="{FF2B5EF4-FFF2-40B4-BE49-F238E27FC236}">
-                <a16:creationId xmlns:a16="http://schemas.microsoft.com/office/drawing/2014/main" id="{B1667707-AE54-C4A4-BB63-50ADC90C0E10}"/>
-              </a:ext>
-            </a:extLst>
-          </p:cNvPr>
-          <p:cNvGraphicFramePr>
-            <a:graphicFrameLocks noGrp="1"/>
-          </p:cNvGraphicFramePr>
-          <p:nvPr>
-            <p:extLst>
-              <p:ext uri="{D42A27DB-BD31-4B8C-83A1-F6EECF244321}">
-                <p14:modId xmlns:p14="http://schemas.microsoft.com/office/powerpoint/2010/main" val="524096390"/>
-              </p:ext>
-            </p:extLst>
-          </p:nvPr>
-        </p:nvGraphicFramePr>
-        <p:xfrm>
-          <a:off x="801615" y="728334"/>
-          <a:ext cx="3009783" cy="3877222"/>
-        </p:xfrm>
-        <a:graphic>
-          <a:graphicData uri="http://schemas.openxmlformats.org/drawingml/2006/table">
-            <a:tbl>
-              <a:tblPr firstRow="1" bandRow="1">
-                <a:tableStyleId>{5C22544A-7EE6-4342-B048-85BDC9FD1C3A}</a:tableStyleId>
-              </a:tblPr>
-              <a:tblGrid>
-                <a:gridCol w="3009783">
-                  <a:extLst>
-                    <a:ext uri="{9D8B030D-6E8A-4147-A177-3AD203B41FA5}">
-                      <a16:colId xmlns:a16="http://schemas.microsoft.com/office/drawing/2014/main" val="1828524323"/>
-                    </a:ext>
-                  </a:extLst>
-                </a:gridCol>
-              </a:tblGrid>
-              <a:tr h="1118724">
-                <a:tc>
-                  <a:txBody>
-                    <a:bodyPr/>
-                    <a:lstStyle/>
-                    <a:p>
-                      <a:r>
-                        <a:rPr kumimoji="1" lang="ja-JP" altLang="en-US" dirty="0"/>
-                        <a:t>メソッド</a:t>
-                      </a:r>
-                      <a:endParaRPr kumimoji="1" lang="en-US" altLang="ja-JP" dirty="0"/>
-                    </a:p>
-                    <a:p>
-                      <a:pPr marL="285750" indent="-285750">
-                        <a:buFont typeface="Arial" panose="020B0604020202020204" pitchFamily="34" charset="0"/>
-                        <a:buChar char="•"/>
-                      </a:pPr>
-                      <a:r>
-                        <a:rPr kumimoji="1" lang="ja-JP" altLang="en-US" sz="1400" dirty="0">
-                          <a:latin typeface="+mj-ea"/>
-                          <a:ea typeface="+mj-ea"/>
-                        </a:rPr>
-                        <a:t>オブジェクトの動作</a:t>
-                      </a:r>
-                    </a:p>
-                  </a:txBody>
-                  <a:tcPr/>
-                </a:tc>
-                <a:extLst>
-                  <a:ext uri="{0D108BD9-81ED-4DB2-BD59-A6C34878D82A}">
-                    <a16:rowId xmlns:a16="http://schemas.microsoft.com/office/drawing/2014/main" val="3101971193"/>
-                  </a:ext>
-                </a:extLst>
-              </a:tr>
-              <a:tr h="2758498">
-                <a:tc>
-                  <a:txBody>
-                    <a:bodyPr/>
-                    <a:lstStyle/>
-                    <a:p>
-                      <a:pPr marL="0" marR="0" lvl="0" indent="0" algn="l" defTabSz="914400" rtl="0" eaLnBrk="1" fontAlgn="auto" latinLnBrk="0" hangingPunct="1">
-                        <a:lnSpc>
-                          <a:spcPct val="100000"/>
-                        </a:lnSpc>
-                        <a:spcBef>
-                          <a:spcPts val="0"/>
-                        </a:spcBef>
-                        <a:spcAft>
-                          <a:spcPts val="0"/>
-                        </a:spcAft>
-                        <a:buClrTx/>
-                        <a:buSzTx/>
-                        <a:buFontTx/>
-                        <a:buNone/>
-                        <a:tabLst/>
-                        <a:defRPr/>
-                      </a:pPr>
-                      <a:r>
-                        <a:rPr kumimoji="1" lang="ja-JP" altLang="en-US" b="1" dirty="0">
-                          <a:solidFill>
-                            <a:srgbClr val="FF0000"/>
-                          </a:solidFill>
-                        </a:rPr>
-                        <a:t>機械の修理をする</a:t>
-                      </a:r>
-                      <a:endParaRPr kumimoji="1" lang="en-US" altLang="ja-JP" b="1" dirty="0">
-                        <a:solidFill>
-                          <a:srgbClr val="FF0000"/>
-                        </a:solidFill>
-                      </a:endParaRPr>
-                    </a:p>
-                    <a:p>
-                      <a:pPr marL="0" marR="0" lvl="0" indent="0" algn="l" defTabSz="914400" rtl="0" eaLnBrk="1" fontAlgn="auto" latinLnBrk="0" hangingPunct="1">
-                        <a:lnSpc>
-                          <a:spcPct val="100000"/>
-                        </a:lnSpc>
-                        <a:spcBef>
-                          <a:spcPts val="0"/>
-                        </a:spcBef>
-                        <a:spcAft>
-                          <a:spcPts val="0"/>
-                        </a:spcAft>
-                        <a:buClrTx/>
-                        <a:buSzTx/>
-                        <a:buFontTx/>
-                        <a:buNone/>
-                        <a:tabLst/>
-                        <a:defRPr/>
-                      </a:pPr>
-                      <a:r>
-                        <a:rPr kumimoji="1" lang="ja-JP" altLang="en-US" dirty="0"/>
-                        <a:t>カバンから中身を出す</a:t>
-                      </a:r>
-                      <a:endParaRPr kumimoji="1" lang="en-US" altLang="ja-JP" dirty="0"/>
-                    </a:p>
-                    <a:p>
-                      <a:pPr marL="0" marR="0" lvl="0" indent="0" algn="l" defTabSz="914400" rtl="0" eaLnBrk="1" fontAlgn="auto" latinLnBrk="0" hangingPunct="1">
-                        <a:lnSpc>
-                          <a:spcPct val="100000"/>
-                        </a:lnSpc>
-                        <a:spcBef>
-                          <a:spcPts val="0"/>
-                        </a:spcBef>
-                        <a:spcAft>
-                          <a:spcPts val="0"/>
-                        </a:spcAft>
-                        <a:buClrTx/>
-                        <a:buSzTx/>
-                        <a:buFontTx/>
-                        <a:buNone/>
-                        <a:tabLst/>
-                        <a:defRPr/>
-                      </a:pPr>
-                      <a:r>
-                        <a:rPr kumimoji="1" lang="ja-JP" altLang="en-US" dirty="0"/>
-                        <a:t>カバンにものを入れる</a:t>
-                      </a:r>
-                    </a:p>
-                    <a:p>
-                      <a:endParaRPr kumimoji="1" lang="ja-JP" altLang="en-US" dirty="0"/>
-                    </a:p>
-                  </a:txBody>
-                  <a:tcPr/>
-                </a:tc>
-                <a:extLst>
-                  <a:ext uri="{0D108BD9-81ED-4DB2-BD59-A6C34878D82A}">
-                    <a16:rowId xmlns:a16="http://schemas.microsoft.com/office/drawing/2014/main" val="1998050814"/>
-                  </a:ext>
-                </a:extLst>
-              </a:tr>
-            </a:tbl>
-          </a:graphicData>
-        </a:graphic>
-      </p:graphicFrame>
-    </p:spTree>
-    <p:extLst>
-      <p:ext uri="{BB962C8B-B14F-4D97-AF65-F5344CB8AC3E}">
-        <p14:creationId xmlns:p14="http://schemas.microsoft.com/office/powerpoint/2010/main" val="3263699481"/>
       </p:ext>
     </p:extLst>
   </p:cSld>
@@ -8134,4 +9812,319 @@
     </a:ext>
   </a:extLst>
 </a:theme>
+</file>
+
+<file path=ppt/theme/theme2.xml><?xml version="1.0" encoding="utf-8"?>
+<a:theme xmlns:a="http://schemas.openxmlformats.org/drawingml/2006/main" name="Office テーマ">
+  <a:themeElements>
+    <a:clrScheme name="Office">
+      <a:dk1>
+        <a:sysClr val="windowText" lastClr="000000"/>
+      </a:dk1>
+      <a:lt1>
+        <a:sysClr val="window" lastClr="FFFFFF"/>
+      </a:lt1>
+      <a:dk2>
+        <a:srgbClr val="0E2841"/>
+      </a:dk2>
+      <a:lt2>
+        <a:srgbClr val="E8E8E8"/>
+      </a:lt2>
+      <a:accent1>
+        <a:srgbClr val="156082"/>
+      </a:accent1>
+      <a:accent2>
+        <a:srgbClr val="E97132"/>
+      </a:accent2>
+      <a:accent3>
+        <a:srgbClr val="196B24"/>
+      </a:accent3>
+      <a:accent4>
+        <a:srgbClr val="0F9ED5"/>
+      </a:accent4>
+      <a:accent5>
+        <a:srgbClr val="A02B93"/>
+      </a:accent5>
+      <a:accent6>
+        <a:srgbClr val="4EA72E"/>
+      </a:accent6>
+      <a:hlink>
+        <a:srgbClr val="467886"/>
+      </a:hlink>
+      <a:folHlink>
+        <a:srgbClr val="96607D"/>
+      </a:folHlink>
+    </a:clrScheme>
+    <a:fontScheme name="Office">
+      <a:majorFont>
+        <a:latin typeface="游ゴシック Light" panose="02110004020202020204"/>
+        <a:ea typeface=""/>
+        <a:cs typeface=""/>
+        <a:font script="Jpan" typeface="游ゴシック Light"/>
+        <a:font script="Hang" typeface="맑은 고딕"/>
+        <a:font script="Hans" typeface="等线 Light"/>
+        <a:font script="Hant" typeface="新細明體"/>
+        <a:font script="Arab" typeface="Times New Roman"/>
+        <a:font script="Hebr" typeface="Times New Roman"/>
+        <a:font script="Thai" typeface="Angsana New"/>
+        <a:font script="Ethi" typeface="Nyala"/>
+        <a:font script="Beng" typeface="Vrinda"/>
+        <a:font script="Gujr" typeface="Shruti"/>
+        <a:font script="Khmr" typeface="MoolBoran"/>
+        <a:font script="Knda" typeface="Tunga"/>
+        <a:font script="Guru" typeface="Raavi"/>
+        <a:font script="Cans" typeface="Euphemia"/>
+        <a:font script="Cher" typeface="Plantagenet Cherokee"/>
+        <a:font script="Yiii" typeface="Microsoft Yi Baiti"/>
+        <a:font script="Tibt" typeface="Microsoft Himalaya"/>
+        <a:font script="Thaa" typeface="MV Boli"/>
+        <a:font script="Deva" typeface="Mangal"/>
+        <a:font script="Telu" typeface="Gautami"/>
+        <a:font script="Taml" typeface="Latha"/>
+        <a:font script="Syrc" typeface="Estrangelo Edessa"/>
+        <a:font script="Orya" typeface="Kalinga"/>
+        <a:font script="Mlym" typeface="Kartika"/>
+        <a:font script="Laoo" typeface="DokChampa"/>
+        <a:font script="Sinh" typeface="Iskoola Pota"/>
+        <a:font script="Mong" typeface="Mongolian Baiti"/>
+        <a:font script="Viet" typeface="Times New Roman"/>
+        <a:font script="Uigh" typeface="Microsoft Uighur"/>
+        <a:font script="Geor" typeface="Sylfaen"/>
+        <a:font script="Armn" typeface="Arial"/>
+        <a:font script="Bugi" typeface="Leelawadee UI"/>
+        <a:font script="Bopo" typeface="Microsoft JhengHei"/>
+        <a:font script="Java" typeface="Javanese Text"/>
+        <a:font script="Lisu" typeface="Segoe UI"/>
+        <a:font script="Mymr" typeface="Myanmar Text"/>
+        <a:font script="Nkoo" typeface="Ebrima"/>
+        <a:font script="Olck" typeface="Nirmala UI"/>
+        <a:font script="Osma" typeface="Ebrima"/>
+        <a:font script="Phag" typeface="Phagspa"/>
+        <a:font script="Syrn" typeface="Estrangelo Edessa"/>
+        <a:font script="Syrj" typeface="Estrangelo Edessa"/>
+        <a:font script="Syre" typeface="Estrangelo Edessa"/>
+        <a:font script="Sora" typeface="Nirmala UI"/>
+        <a:font script="Tale" typeface="Microsoft Tai Le"/>
+        <a:font script="Talu" typeface="Microsoft New Tai Lue"/>
+        <a:font script="Tfng" typeface="Ebrima"/>
+      </a:majorFont>
+      <a:minorFont>
+        <a:latin typeface="游ゴシック" panose="02110004020202020204"/>
+        <a:ea typeface=""/>
+        <a:cs typeface=""/>
+        <a:font script="Jpan" typeface="游ゴシック"/>
+        <a:font script="Hang" typeface="맑은 고딕"/>
+        <a:font script="Hans" typeface="等线"/>
+        <a:font script="Hant" typeface="新細明體"/>
+        <a:font script="Arab" typeface="Arial"/>
+        <a:font script="Hebr" typeface="Arial"/>
+        <a:font script="Thai" typeface="Cordia New"/>
+        <a:font script="Ethi" typeface="Nyala"/>
+        <a:font script="Beng" typeface="Vrinda"/>
+        <a:font script="Gujr" typeface="Shruti"/>
+        <a:font script="Khmr" typeface="DaunPenh"/>
+        <a:font script="Knda" typeface="Tunga"/>
+        <a:font script="Guru" typeface="Raavi"/>
+        <a:font script="Cans" typeface="Euphemia"/>
+        <a:font script="Cher" typeface="Plantagenet Cherokee"/>
+        <a:font script="Yiii" typeface="Microsoft Yi Baiti"/>
+        <a:font script="Tibt" typeface="Microsoft Himalaya"/>
+        <a:font script="Thaa" typeface="MV Boli"/>
+        <a:font script="Deva" typeface="Mangal"/>
+        <a:font script="Telu" typeface="Gautami"/>
+        <a:font script="Taml" typeface="Latha"/>
+        <a:font script="Syrc" typeface="Estrangelo Edessa"/>
+        <a:font script="Orya" typeface="Kalinga"/>
+        <a:font script="Mlym" typeface="Kartika"/>
+        <a:font script="Laoo" typeface="DokChampa"/>
+        <a:font script="Sinh" typeface="Iskoola Pota"/>
+        <a:font script="Mong" typeface="Mongolian Baiti"/>
+        <a:font script="Viet" typeface="Arial"/>
+        <a:font script="Uigh" typeface="Microsoft Uighur"/>
+        <a:font script="Geor" typeface="Sylfaen"/>
+        <a:font script="Armn" typeface="Arial"/>
+        <a:font script="Bugi" typeface="Leelawadee UI"/>
+        <a:font script="Bopo" typeface="Microsoft JhengHei"/>
+        <a:font script="Java" typeface="Javanese Text"/>
+        <a:font script="Lisu" typeface="Segoe UI"/>
+        <a:font script="Mymr" typeface="Myanmar Text"/>
+        <a:font script="Nkoo" typeface="Ebrima"/>
+        <a:font script="Olck" typeface="Nirmala UI"/>
+        <a:font script="Osma" typeface="Ebrima"/>
+        <a:font script="Phag" typeface="Phagspa"/>
+        <a:font script="Syrn" typeface="Estrangelo Edessa"/>
+        <a:font script="Syrj" typeface="Estrangelo Edessa"/>
+        <a:font script="Syre" typeface="Estrangelo Edessa"/>
+        <a:font script="Sora" typeface="Nirmala UI"/>
+        <a:font script="Tale" typeface="Microsoft Tai Le"/>
+        <a:font script="Talu" typeface="Microsoft New Tai Lue"/>
+        <a:font script="Tfng" typeface="Ebrima"/>
+      </a:minorFont>
+    </a:fontScheme>
+    <a:fmtScheme name="Office">
+      <a:fillStyleLst>
+        <a:solidFill>
+          <a:schemeClr val="phClr"/>
+        </a:solidFill>
+        <a:gradFill rotWithShape="1">
+          <a:gsLst>
+            <a:gs pos="0">
+              <a:schemeClr val="phClr">
+                <a:lumMod val="110000"/>
+                <a:satMod val="105000"/>
+                <a:tint val="67000"/>
+              </a:schemeClr>
+            </a:gs>
+            <a:gs pos="50000">
+              <a:schemeClr val="phClr">
+                <a:lumMod val="105000"/>
+                <a:satMod val="103000"/>
+                <a:tint val="73000"/>
+              </a:schemeClr>
+            </a:gs>
+            <a:gs pos="100000">
+              <a:schemeClr val="phClr">
+                <a:lumMod val="105000"/>
+                <a:satMod val="109000"/>
+                <a:tint val="81000"/>
+              </a:schemeClr>
+            </a:gs>
+          </a:gsLst>
+          <a:lin ang="5400000" scaled="0"/>
+        </a:gradFill>
+        <a:gradFill rotWithShape="1">
+          <a:gsLst>
+            <a:gs pos="0">
+              <a:schemeClr val="phClr">
+                <a:satMod val="103000"/>
+                <a:lumMod val="102000"/>
+                <a:tint val="94000"/>
+              </a:schemeClr>
+            </a:gs>
+            <a:gs pos="50000">
+              <a:schemeClr val="phClr">
+                <a:satMod val="110000"/>
+                <a:lumMod val="100000"/>
+                <a:shade val="100000"/>
+              </a:schemeClr>
+            </a:gs>
+            <a:gs pos="100000">
+              <a:schemeClr val="phClr">
+                <a:lumMod val="99000"/>
+                <a:satMod val="120000"/>
+                <a:shade val="78000"/>
+              </a:schemeClr>
+            </a:gs>
+          </a:gsLst>
+          <a:lin ang="5400000" scaled="0"/>
+        </a:gradFill>
+      </a:fillStyleLst>
+      <a:lnStyleLst>
+        <a:ln w="12700" cap="flat" cmpd="sng" algn="ctr">
+          <a:solidFill>
+            <a:schemeClr val="phClr"/>
+          </a:solidFill>
+          <a:prstDash val="solid"/>
+          <a:miter lim="800000"/>
+        </a:ln>
+        <a:ln w="19050" cap="flat" cmpd="sng" algn="ctr">
+          <a:solidFill>
+            <a:schemeClr val="phClr"/>
+          </a:solidFill>
+          <a:prstDash val="solid"/>
+          <a:miter lim="800000"/>
+        </a:ln>
+        <a:ln w="25400" cap="flat" cmpd="sng" algn="ctr">
+          <a:solidFill>
+            <a:schemeClr val="phClr"/>
+          </a:solidFill>
+          <a:prstDash val="solid"/>
+          <a:miter lim="800000"/>
+        </a:ln>
+      </a:lnStyleLst>
+      <a:effectStyleLst>
+        <a:effectStyle>
+          <a:effectLst/>
+        </a:effectStyle>
+        <a:effectStyle>
+          <a:effectLst/>
+        </a:effectStyle>
+        <a:effectStyle>
+          <a:effectLst>
+            <a:outerShdw blurRad="57150" dist="19050" dir="5400000" algn="ctr" rotWithShape="0">
+              <a:srgbClr val="000000">
+                <a:alpha val="63000"/>
+              </a:srgbClr>
+            </a:outerShdw>
+          </a:effectLst>
+        </a:effectStyle>
+      </a:effectStyleLst>
+      <a:bgFillStyleLst>
+        <a:solidFill>
+          <a:schemeClr val="phClr"/>
+        </a:solidFill>
+        <a:solidFill>
+          <a:schemeClr val="phClr">
+            <a:tint val="95000"/>
+            <a:satMod val="170000"/>
+          </a:schemeClr>
+        </a:solidFill>
+        <a:gradFill rotWithShape="1">
+          <a:gsLst>
+            <a:gs pos="0">
+              <a:schemeClr val="phClr">
+                <a:tint val="93000"/>
+                <a:satMod val="150000"/>
+                <a:shade val="98000"/>
+                <a:lumMod val="102000"/>
+              </a:schemeClr>
+            </a:gs>
+            <a:gs pos="50000">
+              <a:schemeClr val="phClr">
+                <a:tint val="98000"/>
+                <a:satMod val="130000"/>
+                <a:shade val="90000"/>
+                <a:lumMod val="103000"/>
+              </a:schemeClr>
+            </a:gs>
+            <a:gs pos="100000">
+              <a:schemeClr val="phClr">
+                <a:shade val="63000"/>
+                <a:satMod val="120000"/>
+              </a:schemeClr>
+            </a:gs>
+          </a:gsLst>
+          <a:lin ang="5400000" scaled="0"/>
+        </a:gradFill>
+      </a:bgFillStyleLst>
+    </a:fmtScheme>
+  </a:themeElements>
+  <a:objectDefaults>
+    <a:lnDef>
+      <a:spPr/>
+      <a:bodyPr/>
+      <a:lstStyle/>
+      <a:style>
+        <a:lnRef idx="2">
+          <a:schemeClr val="accent1"/>
+        </a:lnRef>
+        <a:fillRef idx="0">
+          <a:schemeClr val="accent1"/>
+        </a:fillRef>
+        <a:effectRef idx="1">
+          <a:schemeClr val="accent1"/>
+        </a:effectRef>
+        <a:fontRef idx="minor">
+          <a:schemeClr val="tx1"/>
+        </a:fontRef>
+      </a:style>
+    </a:lnDef>
+  </a:objectDefaults>
+  <a:extraClrSchemeLst/>
+  <a:extLst>
+    <a:ext uri="{05A4C25C-085E-4340-85A3-A5531E510DB2}">
+      <thm15:themeFamily xmlns:thm15="http://schemas.microsoft.com/office/thememl/2012/main" name="Office Theme" id="{2E142A2C-CD16-42D6-873A-C26D2A0506FA}" vid="{1BDDFF52-6CD6-40A5-AB3C-68EB2F1E4D0A}"/>
+    </a:ext>
+  </a:extLst>
+</a:theme>
 </file>